--- a/Interstellar_Hard_SciFi_Presentation.pptx
+++ b/Interstellar_Hard_SciFi_Presentation.pptx
@@ -3095,7 +3095,7 @@
     <p:bg>
       <p:bgPr>
         <a:solidFill>
-          <a:srgbClr val="0A0A1E"/>
+          <a:srgbClr val="08081C"/>
         </a:solidFill>
         <a:effectLst/>
       </p:bgPr>
@@ -3109,14 +3109,148 @@
       <p:grpSpPr/>
       <p:sp>
         <p:nvSpPr>
-          <p:cNvPr id="2" name="TextBox 1"/>
+          <p:cNvPr id="2" name="Oval 1"/>
+          <p:cNvSpPr/>
+          <p:nvPr/>
+        </p:nvSpPr>
+        <p:spPr>
+          <a:xfrm>
+            <a:off x="-914400" y="-914400"/>
+            <a:ext cx="3657600" cy="3657600"/>
+          </a:xfrm>
+          <a:prstGeom prst="ellipse">
+            <a:avLst/>
+          </a:prstGeom>
+          <a:solidFill>
+            <a:srgbClr val="5AAAFF">
+              <a:alpha val="8000"/>
+            </a:srgbClr>
+          </a:solidFill>
+          <a:ln>
+            <a:noFill/>
+          </a:ln>
+        </p:spPr>
+        <p:style>
+          <a:lnRef idx="1">
+            <a:schemeClr val="accent1"/>
+          </a:lnRef>
+          <a:fillRef idx="3">
+            <a:schemeClr val="accent1"/>
+          </a:fillRef>
+          <a:effectRef idx="2">
+            <a:schemeClr val="accent1"/>
+          </a:effectRef>
+          <a:fontRef idx="minor">
+            <a:schemeClr val="lt1"/>
+          </a:fontRef>
+        </p:style>
+        <p:txBody>
+          <a:bodyPr rtlCol="0" anchor="ctr"/>
+          <a:lstStyle/>
+          <a:p>
+            <a:pPr algn="ctr"/>
+          </a:p>
+        </p:txBody>
+      </p:sp>
+      <p:sp>
+        <p:nvSpPr>
+          <p:cNvPr id="3" name="Oval 2"/>
+          <p:cNvSpPr/>
+          <p:nvPr/>
+        </p:nvSpPr>
+        <p:spPr>
+          <a:xfrm>
+            <a:off x="9144000" y="4572000"/>
+            <a:ext cx="4572000" cy="4572000"/>
+          </a:xfrm>
+          <a:prstGeom prst="ellipse">
+            <a:avLst/>
+          </a:prstGeom>
+          <a:solidFill>
+            <a:srgbClr val="FFC33C">
+              <a:alpha val="6000"/>
+            </a:srgbClr>
+          </a:solidFill>
+          <a:ln>
+            <a:noFill/>
+          </a:ln>
+        </p:spPr>
+        <p:style>
+          <a:lnRef idx="1">
+            <a:schemeClr val="accent1"/>
+          </a:lnRef>
+          <a:fillRef idx="3">
+            <a:schemeClr val="accent1"/>
+          </a:fillRef>
+          <a:effectRef idx="2">
+            <a:schemeClr val="accent1"/>
+          </a:effectRef>
+          <a:fontRef idx="minor">
+            <a:schemeClr val="lt1"/>
+          </a:fontRef>
+        </p:style>
+        <p:txBody>
+          <a:bodyPr rtlCol="0" anchor="ctr"/>
+          <a:lstStyle/>
+          <a:p>
+            <a:pPr algn="ctr"/>
+          </a:p>
+        </p:txBody>
+      </p:sp>
+      <p:sp>
+        <p:nvSpPr>
+          <p:cNvPr id="4" name="Rectangle 3"/>
+          <p:cNvSpPr/>
+          <p:nvPr/>
+        </p:nvSpPr>
+        <p:spPr>
+          <a:xfrm>
+            <a:off x="4114800" y="2103120"/>
+            <a:ext cx="3931920" cy="38100"/>
+          </a:xfrm>
+          <a:prstGeom prst="rect">
+            <a:avLst/>
+          </a:prstGeom>
+          <a:solidFill>
+            <a:srgbClr val="5AAAFF"/>
+          </a:solidFill>
+          <a:ln>
+            <a:noFill/>
+          </a:ln>
+          <a:effectLst/>
+        </p:spPr>
+        <p:style>
+          <a:lnRef idx="1">
+            <a:schemeClr val="accent1"/>
+          </a:lnRef>
+          <a:fillRef idx="3">
+            <a:schemeClr val="accent1"/>
+          </a:fillRef>
+          <a:effectRef idx="2">
+            <a:schemeClr val="accent1"/>
+          </a:effectRef>
+          <a:fontRef idx="minor">
+            <a:schemeClr val="lt1"/>
+          </a:fontRef>
+        </p:style>
+        <p:txBody>
+          <a:bodyPr rtlCol="0" anchor="ctr"/>
+          <a:lstStyle/>
+          <a:p>
+            <a:pPr algn="ctr"/>
+          </a:p>
+        </p:txBody>
+      </p:sp>
+      <p:sp>
+        <p:nvSpPr>
+          <p:cNvPr id="5" name="TextBox 4"/>
           <p:cNvSpPr txBox="1"/>
           <p:nvPr/>
         </p:nvSpPr>
         <p:spPr>
           <a:xfrm>
-            <a:off x="914400" y="1371600"/>
-            <a:ext cx="10058400" cy="1097280"/>
+            <a:off x="914400" y="2286000"/>
+            <a:ext cx="10332720" cy="1371600"/>
           </a:xfrm>
           <a:prstGeom prst="rect">
             <a:avLst/>
@@ -3130,9 +3264,9 @@
           <a:lstStyle/>
           <a:p>
             <a:pPr algn="ctr">
-              <a:defRPr sz="5400" b="1">
-                <a:solidFill>
-                  <a:srgbClr val="64B4FF"/>
+              <a:defRPr sz="6000" b="1" i="0">
+                <a:solidFill>
+                  <a:srgbClr val="FAFAFF"/>
                 </a:solidFill>
                 <a:latin typeface="Calibri"/>
               </a:defRPr>
@@ -3145,14 +3279,14 @@
       </p:sp>
       <p:sp>
         <p:nvSpPr>
-          <p:cNvPr id="3" name="TextBox 2"/>
+          <p:cNvPr id="6" name="TextBox 5"/>
           <p:cNvSpPr txBox="1"/>
           <p:nvPr/>
         </p:nvSpPr>
         <p:spPr>
           <a:xfrm>
-            <a:off x="914400" y="2560320"/>
-            <a:ext cx="10058400" cy="731520"/>
+            <a:off x="914400" y="3566160"/>
+            <a:ext cx="10332720" cy="731520"/>
           </a:xfrm>
           <a:prstGeom prst="rect">
             <a:avLst/>
@@ -3166,11 +3300,11 @@
           <a:lstStyle/>
           <a:p>
             <a:pPr algn="ctr">
-              <a:defRPr sz="2800" b="0">
-                <a:solidFill>
-                  <a:srgbClr val="DCDCE6"/>
-                </a:solidFill>
-                <a:latin typeface="Calibri"/>
+              <a:defRPr sz="2600" b="0" i="0">
+                <a:solidFill>
+                  <a:srgbClr val="50DCE6"/>
+                </a:solidFill>
+                <a:latin typeface="Calibri Light"/>
               </a:defRPr>
             </a:pPr>
             <a:r>
@@ -3181,14 +3315,58 @@
       </p:sp>
       <p:sp>
         <p:nvSpPr>
-          <p:cNvPr id="4" name="TextBox 3"/>
+          <p:cNvPr id="7" name="Rectangle 6"/>
+          <p:cNvSpPr/>
+          <p:nvPr/>
+        </p:nvSpPr>
+        <p:spPr>
+          <a:xfrm>
+            <a:off x="5029200" y="4572000"/>
+            <a:ext cx="2103120" cy="25400"/>
+          </a:xfrm>
+          <a:prstGeom prst="rect">
+            <a:avLst/>
+          </a:prstGeom>
+          <a:solidFill>
+            <a:srgbClr val="5AAAFF"/>
+          </a:solidFill>
+          <a:ln>
+            <a:noFill/>
+          </a:ln>
+          <a:effectLst/>
+        </p:spPr>
+        <p:style>
+          <a:lnRef idx="1">
+            <a:schemeClr val="accent1"/>
+          </a:lnRef>
+          <a:fillRef idx="3">
+            <a:schemeClr val="accent1"/>
+          </a:fillRef>
+          <a:effectRef idx="2">
+            <a:schemeClr val="accent1"/>
+          </a:effectRef>
+          <a:fontRef idx="minor">
+            <a:schemeClr val="lt1"/>
+          </a:fontRef>
+        </p:style>
+        <p:txBody>
+          <a:bodyPr rtlCol="0" anchor="ctr"/>
+          <a:lstStyle/>
+          <a:p>
+            <a:pPr algn="ctr"/>
+          </a:p>
+        </p:txBody>
+      </p:sp>
+      <p:sp>
+        <p:nvSpPr>
+          <p:cNvPr id="8" name="TextBox 7"/>
           <p:cNvSpPr txBox="1"/>
           <p:nvPr/>
         </p:nvSpPr>
         <p:spPr>
           <a:xfrm>
-            <a:off x="914400" y="3657600"/>
-            <a:ext cx="10058400" cy="548640"/>
+            <a:off x="914400" y="4846320"/>
+            <a:ext cx="10332720" cy="548640"/>
           </a:xfrm>
           <a:prstGeom prst="rect">
             <a:avLst/>
@@ -3202,29 +3380,29 @@
           <a:lstStyle/>
           <a:p>
             <a:pPr algn="ctr">
-              <a:defRPr sz="2000" b="0">
-                <a:solidFill>
-                  <a:srgbClr val="AAAABE"/>
-                </a:solidFill>
-                <a:latin typeface="Calibri"/>
-              </a:defRPr>
-            </a:pPr>
-            <a:r>
-              <a:t>Directed by Christopher Nolan (2014)</a:t>
-            </a:r>
-          </a:p>
-        </p:txBody>
-      </p:sp>
-      <p:sp>
-        <p:nvSpPr>
-          <p:cNvPr id="5" name="TextBox 4"/>
+              <a:defRPr sz="1800" b="0" i="0">
+                <a:solidFill>
+                  <a:srgbClr val="969BB4"/>
+                </a:solidFill>
+                <a:latin typeface="Calibri Light"/>
+              </a:defRPr>
+            </a:pPr>
+            <a:r>
+              <a:t>Directed by Christopher Nolan  •  2014</a:t>
+            </a:r>
+          </a:p>
+        </p:txBody>
+      </p:sp>
+      <p:sp>
+        <p:nvSpPr>
+          <p:cNvPr id="9" name="TextBox 8"/>
           <p:cNvSpPr txBox="1"/>
           <p:nvPr/>
         </p:nvSpPr>
         <p:spPr>
           <a:xfrm>
-            <a:off x="914400" y="4754880"/>
-            <a:ext cx="10058400" cy="731520"/>
+            <a:off x="914400" y="5669280"/>
+            <a:ext cx="10332720" cy="548640"/>
           </a:xfrm>
           <a:prstGeom prst="rect">
             <a:avLst/>
@@ -3238,15 +3416,15 @@
           <a:lstStyle/>
           <a:p>
             <a:pPr algn="ctr">
-              <a:defRPr sz="1600" b="0">
-                <a:solidFill>
-                  <a:srgbClr val="AAAABE"/>
-                </a:solidFill>
-                <a:latin typeface="Calibri"/>
-              </a:defRPr>
-            </a:pPr>
-            <a:r>
-              <a:t>ISU Genre Study — Companion to Project Hail Mary by Andy Weir</a:t>
+              <a:defRPr sz="1400" b="0" i="1">
+                <a:solidFill>
+                  <a:srgbClr val="969BB4"/>
+                </a:solidFill>
+                <a:latin typeface="Calibri Light"/>
+              </a:defRPr>
+            </a:pPr>
+            <a:r>
+              <a:t>ISU Genre Study  |  Companion to Project Hail Mary by Andy Weir</a:t>
             </a:r>
           </a:p>
         </p:txBody>
@@ -3256,6 +3434,9 @@
   <p:clrMapOvr>
     <a:masterClrMapping/>
   </p:clrMapOvr>
+  <p:transition xmlns:ns0="http://schemas.microsoft.com/office/powerpoint/2010/main" spd="med" ns0:dur="1000">
+    <p:fade thruBlk="1"/>
+  </p:transition>
 </p:sld>
 </file>
 
@@ -3265,7 +3446,7 @@
     <p:bg>
       <p:bgPr>
         <a:solidFill>
-          <a:srgbClr val="141432"/>
+          <a:srgbClr val="101230"/>
         </a:solidFill>
         <a:effectLst/>
       </p:bgPr>
@@ -3279,14 +3460,104 @@
       <p:grpSpPr/>
       <p:sp>
         <p:nvSpPr>
-          <p:cNvPr id="2" name="TextBox 1"/>
+          <p:cNvPr id="2" name="Oval 1"/>
+          <p:cNvSpPr/>
+          <p:nvPr/>
+        </p:nvSpPr>
+        <p:spPr>
+          <a:xfrm>
+            <a:off x="0" y="0"/>
+            <a:ext cx="4572000" cy="4572000"/>
+          </a:xfrm>
+          <a:prstGeom prst="ellipse">
+            <a:avLst/>
+          </a:prstGeom>
+          <a:solidFill>
+            <a:srgbClr val="FFC33C">
+              <a:alpha val="4000"/>
+            </a:srgbClr>
+          </a:solidFill>
+          <a:ln>
+            <a:noFill/>
+          </a:ln>
+        </p:spPr>
+        <p:style>
+          <a:lnRef idx="1">
+            <a:schemeClr val="accent1"/>
+          </a:lnRef>
+          <a:fillRef idx="3">
+            <a:schemeClr val="accent1"/>
+          </a:fillRef>
+          <a:effectRef idx="2">
+            <a:schemeClr val="accent1"/>
+          </a:effectRef>
+          <a:fontRef idx="minor">
+            <a:schemeClr val="lt1"/>
+          </a:fontRef>
+        </p:style>
+        <p:txBody>
+          <a:bodyPr rtlCol="0" anchor="ctr"/>
+          <a:lstStyle/>
+          <a:p>
+            <a:pPr algn="ctr"/>
+          </a:p>
+        </p:txBody>
+      </p:sp>
+      <p:sp>
+        <p:nvSpPr>
+          <p:cNvPr id="3" name="Oval 2"/>
+          <p:cNvSpPr/>
+          <p:nvPr/>
+        </p:nvSpPr>
+        <p:spPr>
+          <a:xfrm>
+            <a:off x="8229600" y="3657600"/>
+            <a:ext cx="4572000" cy="4572000"/>
+          </a:xfrm>
+          <a:prstGeom prst="ellipse">
+            <a:avLst/>
+          </a:prstGeom>
+          <a:solidFill>
+            <a:srgbClr val="5AAAFF">
+              <a:alpha val="4000"/>
+            </a:srgbClr>
+          </a:solidFill>
+          <a:ln>
+            <a:noFill/>
+          </a:ln>
+        </p:spPr>
+        <p:style>
+          <a:lnRef idx="1">
+            <a:schemeClr val="accent1"/>
+          </a:lnRef>
+          <a:fillRef idx="3">
+            <a:schemeClr val="accent1"/>
+          </a:fillRef>
+          <a:effectRef idx="2">
+            <a:schemeClr val="accent1"/>
+          </a:effectRef>
+          <a:fontRef idx="minor">
+            <a:schemeClr val="lt1"/>
+          </a:fontRef>
+        </p:style>
+        <p:txBody>
+          <a:bodyPr rtlCol="0" anchor="ctr"/>
+          <a:lstStyle/>
+          <a:p>
+            <a:pPr algn="ctr"/>
+          </a:p>
+        </p:txBody>
+      </p:sp>
+      <p:sp>
+        <p:nvSpPr>
+          <p:cNvPr id="4" name="TextBox 3"/>
           <p:cNvSpPr txBox="1"/>
           <p:nvPr/>
         </p:nvSpPr>
         <p:spPr>
           <a:xfrm>
-            <a:off x="1371600" y="1371600"/>
-            <a:ext cx="9144000" cy="2743200"/>
+            <a:off x="1371600" y="731520"/>
+            <a:ext cx="1828800" cy="1371600"/>
           </a:xfrm>
           <a:prstGeom prst="rect">
             <a:avLst/>
@@ -3299,38 +3570,30 @@
           </a:bodyPr>
           <a:lstStyle/>
           <a:p>
-            <a:pPr algn="ctr">
-              <a:defRPr sz="3000" b="1">
-                <a:solidFill>
-                  <a:srgbClr val="FFC850"/>
-                </a:solidFill>
-                <a:latin typeface="Calibri"/>
-              </a:defRPr>
-            </a:pPr>
-            <a:r>
-              <a:t>"Love is the one thing we're capable of</a:t>
-            </a:r>
-            <a:br/>
-            <a:r>
-              <a:t>perceiving that transcends</a:t>
-            </a:r>
-            <a:br/>
-            <a:r>
-              <a:t>dimensions of time and space."</a:t>
-            </a:r>
-          </a:p>
-        </p:txBody>
-      </p:sp>
-      <p:sp>
-        <p:nvSpPr>
-          <p:cNvPr id="3" name="TextBox 2"/>
+            <a:pPr algn="l">
+              <a:defRPr sz="10000" b="1" i="0">
+                <a:solidFill>
+                  <a:srgbClr val="FFC33C"/>
+                </a:solidFill>
+                <a:latin typeface="Georgia"/>
+              </a:defRPr>
+            </a:pPr>
+            <a:r>
+              <a:t>“</a:t>
+            </a:r>
+          </a:p>
+        </p:txBody>
+      </p:sp>
+      <p:sp>
+        <p:nvSpPr>
+          <p:cNvPr id="5" name="TextBox 4"/>
           <p:cNvSpPr txBox="1"/>
           <p:nvPr/>
         </p:nvSpPr>
         <p:spPr>
           <a:xfrm>
-            <a:off x="1371600" y="3931920"/>
-            <a:ext cx="9144000" cy="548640"/>
+            <a:off x="1828800" y="1645920"/>
+            <a:ext cx="8503920" cy="2286000"/>
           </a:xfrm>
           <a:prstGeom prst="rect">
             <a:avLst/>
@@ -3344,29 +3607,37 @@
           <a:lstStyle/>
           <a:p>
             <a:pPr algn="ctr">
-              <a:defRPr sz="1800" b="0">
-                <a:solidFill>
-                  <a:srgbClr val="AAAABE"/>
-                </a:solidFill>
-                <a:latin typeface="Calibri"/>
-              </a:defRPr>
-            </a:pPr>
-            <a:r>
-              <a:t>— Dr. Amelia Brand</a:t>
-            </a:r>
-          </a:p>
-        </p:txBody>
-      </p:sp>
-      <p:sp>
-        <p:nvSpPr>
-          <p:cNvPr id="4" name="TextBox 3"/>
+              <a:defRPr sz="2800" b="0" i="1">
+                <a:solidFill>
+                  <a:srgbClr val="FAFAFF"/>
+                </a:solidFill>
+                <a:latin typeface="Georgia"/>
+              </a:defRPr>
+            </a:pPr>
+            <a:r>
+              <a:t>Love is the one thing we're capable of</a:t>
+            </a:r>
+            <a:br/>
+            <a:r>
+              <a:t>perceiving that transcends</a:t>
+            </a:r>
+            <a:br/>
+            <a:r>
+              <a:t>dimensions of time and space.</a:t>
+            </a:r>
+          </a:p>
+        </p:txBody>
+      </p:sp>
+      <p:sp>
+        <p:nvSpPr>
+          <p:cNvPr id="6" name="TextBox 5"/>
           <p:cNvSpPr txBox="1"/>
           <p:nvPr/>
         </p:nvSpPr>
         <p:spPr>
           <a:xfrm>
-            <a:off x="1097280" y="4754880"/>
-            <a:ext cx="9601200" cy="1828800"/>
+            <a:off x="1828800" y="3840480"/>
+            <a:ext cx="8503920" cy="457200"/>
           </a:xfrm>
           <a:prstGeom prst="rect">
             <a:avLst/>
@@ -3380,15 +3651,127 @@
           <a:lstStyle/>
           <a:p>
             <a:pPr algn="ctr">
-              <a:defRPr sz="1800" b="0">
-                <a:solidFill>
-                  <a:srgbClr val="DCDCE6"/>
-                </a:solidFill>
-                <a:latin typeface="Calibri"/>
-              </a:defRPr>
-            </a:pPr>
-            <a:r>
-              <a:t>The film's most debated line. It sits in tension with everything the science has told us — Nolan is asking whether reason alone is enough.</a:t>
+              <a:defRPr sz="1600" b="0" i="1">
+                <a:solidFill>
+                  <a:srgbClr val="969BB4"/>
+                </a:solidFill>
+                <a:latin typeface="Calibri Light"/>
+              </a:defRPr>
+            </a:pPr>
+            <a:r>
+              <a:t>— Dr. Amelia Brand</a:t>
+            </a:r>
+          </a:p>
+        </p:txBody>
+      </p:sp>
+      <p:sp>
+        <p:nvSpPr>
+          <p:cNvPr id="7" name="Rectangle 6"/>
+          <p:cNvSpPr/>
+          <p:nvPr/>
+        </p:nvSpPr>
+        <p:spPr>
+          <a:xfrm>
+            <a:off x="4572000" y="4572000"/>
+            <a:ext cx="3017520" cy="19050"/>
+          </a:xfrm>
+          <a:prstGeom prst="rect">
+            <a:avLst/>
+          </a:prstGeom>
+          <a:solidFill>
+            <a:srgbClr val="FFC33C"/>
+          </a:solidFill>
+          <a:ln>
+            <a:noFill/>
+          </a:ln>
+          <a:effectLst/>
+        </p:spPr>
+        <p:style>
+          <a:lnRef idx="1">
+            <a:schemeClr val="accent1"/>
+          </a:lnRef>
+          <a:fillRef idx="3">
+            <a:schemeClr val="accent1"/>
+          </a:fillRef>
+          <a:effectRef idx="2">
+            <a:schemeClr val="accent1"/>
+          </a:effectRef>
+          <a:fontRef idx="minor">
+            <a:schemeClr val="lt1"/>
+          </a:fontRef>
+        </p:style>
+        <p:txBody>
+          <a:bodyPr rtlCol="0" anchor="ctr"/>
+          <a:lstStyle/>
+          <a:p>
+            <a:pPr algn="ctr"/>
+          </a:p>
+        </p:txBody>
+      </p:sp>
+      <p:sp>
+        <p:nvSpPr>
+          <p:cNvPr id="8" name="TextBox 7"/>
+          <p:cNvSpPr txBox="1"/>
+          <p:nvPr/>
+        </p:nvSpPr>
+        <p:spPr>
+          <a:xfrm>
+            <a:off x="1371600" y="4846320"/>
+            <a:ext cx="9418320" cy="1645920"/>
+          </a:xfrm>
+          <a:prstGeom prst="rect">
+            <a:avLst/>
+          </a:prstGeom>
+          <a:noFill/>
+        </p:spPr>
+        <p:txBody>
+          <a:bodyPr wrap="square">
+            <a:spAutoFit/>
+          </a:bodyPr>
+          <a:lstStyle/>
+          <a:p>
+            <a:pPr algn="ctr">
+              <a:defRPr sz="1600" b="0" i="0">
+                <a:solidFill>
+                  <a:srgbClr val="D2D7E6"/>
+                </a:solidFill>
+                <a:latin typeface="Calibri Light"/>
+              </a:defRPr>
+            </a:pPr>
+            <a:r>
+              <a:t>The film's most debated line. It sits in tension with everything the science</a:t>
+            </a:r>
+          </a:p>
+          <a:p>
+            <a:pPr algn="ctr">
+              <a:spcBef>
+                <a:spcPts val="400"/>
+              </a:spcBef>
+              <a:defRPr sz="1600" b="0" i="0">
+                <a:solidFill>
+                  <a:srgbClr val="D2D7E6"/>
+                </a:solidFill>
+                <a:latin typeface="Calibri Light"/>
+              </a:defRPr>
+            </a:pPr>
+            <a:r>
+              <a:t>has told us. Nolan is asking whether reason alone is enough —</a:t>
+            </a:r>
+          </a:p>
+          <a:p>
+            <a:pPr algn="ctr">
+              <a:spcBef>
+                <a:spcPts val="400"/>
+              </a:spcBef>
+              <a:defRPr sz="1600" b="0" i="0">
+                <a:solidFill>
+                  <a:srgbClr val="D2D7E6"/>
+                </a:solidFill>
+                <a:latin typeface="Calibri Light"/>
+              </a:defRPr>
+            </a:pPr>
+            <a:r>
+              <a:t>exactly the kind of question hard sci-fi is built to ask.</a:t>
             </a:r>
           </a:p>
         </p:txBody>
@@ -3398,6 +3781,9 @@
   <p:clrMapOvr>
     <a:masterClrMapping/>
   </p:clrMapOvr>
+  <p:transition xmlns:ns0="http://schemas.microsoft.com/office/powerpoint/2010/main" spd="med" ns0:dur="1000">
+    <p:fade thruBlk="1"/>
+  </p:transition>
 </p:sld>
 </file>
 
@@ -3407,7 +3793,7 @@
     <p:bg>
       <p:bgPr>
         <a:solidFill>
-          <a:srgbClr val="0A0A1E"/>
+          <a:srgbClr val="08081C"/>
         </a:solidFill>
         <a:effectLst/>
       </p:bgPr>
@@ -3428,7 +3814,7 @@
         <p:spPr>
           <a:xfrm>
             <a:off x="731520" y="365760"/>
-            <a:ext cx="10058400" cy="822960"/>
+            <a:ext cx="10058400" cy="731520"/>
           </a:xfrm>
           <a:prstGeom prst="rect">
             <a:avLst/>
@@ -3442,9 +3828,9 @@
           <a:lstStyle/>
           <a:p>
             <a:pPr algn="l">
-              <a:defRPr sz="3600" b="1">
-                <a:solidFill>
-                  <a:srgbClr val="64B4FF"/>
+              <a:defRPr sz="3400" b="1" i="0">
+                <a:solidFill>
+                  <a:srgbClr val="5AAAFF"/>
                 </a:solidFill>
                 <a:latin typeface="Calibri"/>
               </a:defRPr>
@@ -3457,14 +3843,113 @@
       </p:sp>
       <p:sp>
         <p:nvSpPr>
-          <p:cNvPr id="3" name="TextBox 2"/>
+          <p:cNvPr id="3" name="Rectangle 2"/>
+          <p:cNvSpPr/>
+          <p:nvPr/>
+        </p:nvSpPr>
+        <p:spPr>
+          <a:xfrm>
+            <a:off x="731520" y="1051560"/>
+            <a:ext cx="4114800" cy="25400"/>
+          </a:xfrm>
+          <a:prstGeom prst="rect">
+            <a:avLst/>
+          </a:prstGeom>
+          <a:solidFill>
+            <a:srgbClr val="5AAAFF"/>
+          </a:solidFill>
+          <a:ln>
+            <a:noFill/>
+          </a:ln>
+          <a:effectLst/>
+        </p:spPr>
+        <p:style>
+          <a:lnRef idx="1">
+            <a:schemeClr val="accent1"/>
+          </a:lnRef>
+          <a:fillRef idx="3">
+            <a:schemeClr val="accent1"/>
+          </a:fillRef>
+          <a:effectRef idx="2">
+            <a:schemeClr val="accent1"/>
+          </a:effectRef>
+          <a:fontRef idx="minor">
+            <a:schemeClr val="lt1"/>
+          </a:fontRef>
+        </p:style>
+        <p:txBody>
+          <a:bodyPr rtlCol="0" anchor="ctr"/>
+          <a:lstStyle/>
+          <a:p>
+            <a:pPr algn="ctr"/>
+          </a:p>
+        </p:txBody>
+      </p:sp>
+      <p:sp>
+        <p:nvSpPr>
+          <p:cNvPr id="4" name="Rounded Rectangle 3"/>
+          <p:cNvSpPr/>
+          <p:nvPr/>
+        </p:nvSpPr>
+        <p:spPr>
+          <a:xfrm>
+            <a:off x="731520" y="1463040"/>
+            <a:ext cx="5029200" cy="640080"/>
+          </a:xfrm>
+          <a:prstGeom prst="roundRect">
+            <a:avLst/>
+          </a:prstGeom>
+          <a:solidFill>
+            <a:srgbClr val="191C37"/>
+          </a:solidFill>
+          <a:ln w="12700">
+            <a:solidFill>
+              <a:srgbClr val="50DCE6"/>
+            </a:solidFill>
+          </a:ln>
+        </p:spPr>
+        <p:style>
+          <a:lnRef idx="1">
+            <a:schemeClr val="accent1"/>
+          </a:lnRef>
+          <a:fillRef idx="3">
+            <a:schemeClr val="accent1"/>
+          </a:fillRef>
+          <a:effectRef idx="2">
+            <a:schemeClr val="accent1"/>
+          </a:effectRef>
+          <a:fontRef idx="minor">
+            <a:schemeClr val="lt1"/>
+          </a:fontRef>
+        </p:style>
+        <p:txBody>
+          <a:bodyPr rtlCol="0" anchor="ctr"/>
+          <a:lstStyle/>
+          <a:p>
+            <a:pPr algn="ctr">
+              <a:defRPr sz="1600">
+                <a:solidFill>
+                  <a:srgbClr val="50DCE6"/>
+                </a:solidFill>
+                <a:latin typeface="Calibri Light"/>
+              </a:defRPr>
+            </a:pPr>
+            <a:r>
+              <a:t>    ▶  Timestamp: ~1:05:00   |   Duration: ~5 minutes</a:t>
+            </a:r>
+          </a:p>
+        </p:txBody>
+      </p:sp>
+      <p:sp>
+        <p:nvSpPr>
+          <p:cNvPr id="5" name="TextBox 4"/>
           <p:cNvSpPr txBox="1"/>
           <p:nvPr/>
         </p:nvSpPr>
         <p:spPr>
           <a:xfrm>
-            <a:off x="731520" y="1463040"/>
-            <a:ext cx="10515600" cy="5029200"/>
+            <a:off x="731520" y="2468880"/>
+            <a:ext cx="4572000" cy="457200"/>
           </a:xfrm>
           <a:prstGeom prst="rect">
             <a:avLst/>
@@ -3478,121 +3963,151 @@
           <a:lstStyle/>
           <a:p>
             <a:pPr algn="l">
-              <a:defRPr sz="1800" b="1">
-                <a:solidFill>
-                  <a:srgbClr val="AAAABE"/>
+              <a:defRPr sz="1500" b="1" i="0">
+                <a:solidFill>
+                  <a:srgbClr val="FFC33C"/>
                 </a:solidFill>
                 <a:latin typeface="Calibri"/>
               </a:defRPr>
             </a:pPr>
             <a:r>
-              <a:t>Timestamp: ~1:05:00  |  Duration: ~5 minutes</a:t>
-            </a:r>
+              <a:t>WHAT TO WATCH FOR</a:t>
+            </a:r>
+          </a:p>
+        </p:txBody>
+      </p:sp>
+      <p:sp>
+        <p:nvSpPr>
+          <p:cNvPr id="6" name="TextBox 5"/>
+          <p:cNvSpPr txBox="1"/>
+          <p:nvPr/>
+        </p:nvSpPr>
+        <p:spPr>
+          <a:xfrm>
+            <a:off x="731520" y="2926080"/>
+            <a:ext cx="10515600" cy="2286000"/>
+          </a:xfrm>
+          <a:prstGeom prst="rect">
+            <a:avLst/>
+          </a:prstGeom>
+          <a:noFill/>
+        </p:spPr>
+        <p:txBody>
+          <a:bodyPr wrap="square">
+            <a:spAutoFit/>
+          </a:bodyPr>
+          <a:lstStyle/>
+          <a:p>
+            <a:pPr algn="l">
+              <a:defRPr sz="1200" b="0" i="0">
+                <a:solidFill>
+                  <a:srgbClr val="FFFFFF"/>
+                </a:solidFill>
+                <a:latin typeface="Calibri Light"/>
+              </a:defRPr>
+            </a:pPr>
           </a:p>
           <a:p>
             <a:pPr algn="l">
               <a:spcBef>
-                <a:spcPts val="1200"/>
+                <a:spcPts val="1000"/>
               </a:spcBef>
-              <a:defRPr sz="1000" b="0">
-                <a:solidFill>
-                  <a:srgbClr val="FFFFFF"/>
-                </a:solidFill>
-                <a:latin typeface="Calibri"/>
-              </a:defRPr>
-            </a:pPr>
+              <a:defRPr sz="1800" b="0" i="0">
+                <a:solidFill>
+                  <a:srgbClr val="D2D7E6"/>
+                </a:solidFill>
+                <a:latin typeface="Calibri Light"/>
+              </a:defRPr>
+            </a:pPr>
+            <a:r>
+              <a:t>▸  Cooper and Brand land on a water world in Gargantua's gravitational field</a:t>
+            </a:r>
           </a:p>
           <a:p>
             <a:pPr algn="l">
               <a:spcBef>
-                <a:spcPts val="1200"/>
+                <a:spcPts val="1000"/>
               </a:spcBef>
-              <a:defRPr sz="2200" b="1">
-                <a:solidFill>
-                  <a:srgbClr val="FFC850"/>
-                </a:solidFill>
-                <a:latin typeface="Calibri"/>
-              </a:defRPr>
-            </a:pPr>
-            <a:r>
-              <a:t>What to watch for:</a:t>
+              <a:defRPr sz="1800" b="0" i="0">
+                <a:solidFill>
+                  <a:srgbClr val="D2D7E6"/>
+                </a:solidFill>
+                <a:latin typeface="Calibri Light"/>
+              </a:defRPr>
+            </a:pPr>
+            <a:r>
+              <a:t>▸  Every hour on the surface = 7 years on Earth</a:t>
             </a:r>
           </a:p>
           <a:p>
             <a:pPr algn="l">
               <a:spcBef>
-                <a:spcPts val="1200"/>
+                <a:spcPts val="1000"/>
               </a:spcBef>
-              <a:defRPr sz="1800" b="0">
-                <a:solidFill>
-                  <a:srgbClr val="DCDCE6"/>
-                </a:solidFill>
-                <a:latin typeface="Calibri"/>
-              </a:defRPr>
-            </a:pPr>
-            <a:r>
-              <a:t>• Cooper and Brand land on a water world in Gargantua's gravitational field</a:t>
-            </a:r>
-          </a:p>
-          <a:p>
-            <a:pPr algn="l">
-              <a:spcBef>
-                <a:spcPts val="1200"/>
-              </a:spcBef>
-              <a:defRPr sz="1800" b="0">
-                <a:solidFill>
-                  <a:srgbClr val="DCDCE6"/>
-                </a:solidFill>
-                <a:latin typeface="Calibri"/>
-              </a:defRPr>
-            </a:pPr>
-            <a:r>
-              <a:t>• Every hour on the surface = 7 years on Earth</a:t>
-            </a:r>
-          </a:p>
-          <a:p>
-            <a:pPr algn="l">
-              <a:spcBef>
-                <a:spcPts val="1200"/>
-              </a:spcBef>
-              <a:defRPr sz="1800" b="0">
-                <a:solidFill>
-                  <a:srgbClr val="DCDCE6"/>
-                </a:solidFill>
-                <a:latin typeface="Calibri"/>
-              </a:defRPr>
-            </a:pPr>
-            <a:r>
-              <a:t>• When they return, Romilly has aged 23 years waiting</a:t>
-            </a:r>
-          </a:p>
-          <a:p>
-            <a:pPr algn="l">
-              <a:spcBef>
-                <a:spcPts val="1200"/>
-              </a:spcBef>
-              <a:defRPr sz="1000" b="0">
-                <a:solidFill>
-                  <a:srgbClr val="FFFFFF"/>
-                </a:solidFill>
-                <a:latin typeface="Calibri"/>
-              </a:defRPr>
-            </a:pPr>
-          </a:p>
-          <a:p>
-            <a:pPr algn="l">
-              <a:spcBef>
-                <a:spcPts val="1200"/>
-              </a:spcBef>
-              <a:defRPr sz="2200" b="1">
-                <a:solidFill>
-                  <a:srgbClr val="FFC850"/>
-                </a:solidFill>
-                <a:latin typeface="Calibri"/>
-              </a:defRPr>
-            </a:pPr>
-            <a:r>
-              <a:t>"The science is not decorating the tragedy — it IS the tragedy."</a:t>
+              <a:defRPr sz="1800" b="0" i="0">
+                <a:solidFill>
+                  <a:srgbClr val="D2D7E6"/>
+                </a:solidFill>
+                <a:latin typeface="Calibri Light"/>
+              </a:defRPr>
+            </a:pPr>
+            <a:r>
+              <a:t>▸  When they return, Romilly has aged 23 years waiting for them</a:t>
+            </a:r>
+          </a:p>
+        </p:txBody>
+      </p:sp>
+      <p:sp>
+        <p:nvSpPr>
+          <p:cNvPr id="7" name="Rounded Rectangle 6"/>
+          <p:cNvSpPr/>
+          <p:nvPr/>
+        </p:nvSpPr>
+        <p:spPr>
+          <a:xfrm>
+            <a:off x="1371600" y="5120640"/>
+            <a:ext cx="9418320" cy="1097280"/>
+          </a:xfrm>
+          <a:prstGeom prst="roundRect">
+            <a:avLst/>
+          </a:prstGeom>
+          <a:solidFill>
+            <a:srgbClr val="141632"/>
+          </a:solidFill>
+          <a:ln w="19050">
+            <a:solidFill>
+              <a:srgbClr val="FFC33C"/>
+            </a:solidFill>
+          </a:ln>
+        </p:spPr>
+        <p:style>
+          <a:lnRef idx="1">
+            <a:schemeClr val="accent1"/>
+          </a:lnRef>
+          <a:fillRef idx="3">
+            <a:schemeClr val="accent1"/>
+          </a:fillRef>
+          <a:effectRef idx="2">
+            <a:schemeClr val="accent1"/>
+          </a:effectRef>
+          <a:fontRef idx="minor">
+            <a:schemeClr val="lt1"/>
+          </a:fontRef>
+        </p:style>
+        <p:txBody>
+          <a:bodyPr rtlCol="0" anchor="ctr" wrap="square"/>
+          <a:lstStyle/>
+          <a:p>
+            <a:pPr algn="ctr">
+              <a:defRPr sz="2000" b="1">
+                <a:solidFill>
+                  <a:srgbClr val="FFC33C"/>
+                </a:solidFill>
+                <a:latin typeface="Calibri Light"/>
+              </a:defRPr>
+            </a:pPr>
+            <a:r>
+              <a:t>  "The science is not decorating the tragedy — it IS the tragedy."</a:t>
             </a:r>
           </a:p>
         </p:txBody>
@@ -3602,6 +4117,9 @@
   <p:clrMapOvr>
     <a:masterClrMapping/>
   </p:clrMapOvr>
+  <p:transition xmlns:ns0="http://schemas.microsoft.com/office/powerpoint/2010/main" spd="med" ns0:dur="800">
+    <p:cover dir="l"/>
+  </p:transition>
 </p:sld>
 </file>
 
@@ -3611,7 +4129,7 @@
     <p:bg>
       <p:bgPr>
         <a:solidFill>
-          <a:srgbClr val="0A0A1E"/>
+          <a:srgbClr val="08081C"/>
         </a:solidFill>
         <a:effectLst/>
       </p:bgPr>
@@ -3625,14 +4143,59 @@
       <p:grpSpPr/>
       <p:sp>
         <p:nvSpPr>
-          <p:cNvPr id="2" name="TextBox 1"/>
+          <p:cNvPr id="2" name="Oval 1"/>
+          <p:cNvSpPr/>
+          <p:nvPr/>
+        </p:nvSpPr>
+        <p:spPr>
+          <a:xfrm>
+            <a:off x="9144000" y="-914400"/>
+            <a:ext cx="3657600" cy="3657600"/>
+          </a:xfrm>
+          <a:prstGeom prst="ellipse">
+            <a:avLst/>
+          </a:prstGeom>
+          <a:solidFill>
+            <a:srgbClr val="FFC33C">
+              <a:alpha val="5000"/>
+            </a:srgbClr>
+          </a:solidFill>
+          <a:ln>
+            <a:noFill/>
+          </a:ln>
+        </p:spPr>
+        <p:style>
+          <a:lnRef idx="1">
+            <a:schemeClr val="accent1"/>
+          </a:lnRef>
+          <a:fillRef idx="3">
+            <a:schemeClr val="accent1"/>
+          </a:fillRef>
+          <a:effectRef idx="2">
+            <a:schemeClr val="accent1"/>
+          </a:effectRef>
+          <a:fontRef idx="minor">
+            <a:schemeClr val="lt1"/>
+          </a:fontRef>
+        </p:style>
+        <p:txBody>
+          <a:bodyPr rtlCol="0" anchor="ctr"/>
+          <a:lstStyle/>
+          <a:p>
+            <a:pPr algn="ctr"/>
+          </a:p>
+        </p:txBody>
+      </p:sp>
+      <p:sp>
+        <p:nvSpPr>
+          <p:cNvPr id="3" name="TextBox 2"/>
           <p:cNvSpPr txBox="1"/>
           <p:nvPr/>
         </p:nvSpPr>
         <p:spPr>
           <a:xfrm>
             <a:off x="731520" y="365760"/>
-            <a:ext cx="10058400" cy="822960"/>
+            <a:ext cx="10058400" cy="731520"/>
           </a:xfrm>
           <a:prstGeom prst="rect">
             <a:avLst/>
@@ -3646,9 +4209,9 @@
           <a:lstStyle/>
           <a:p>
             <a:pPr algn="l">
-              <a:defRPr sz="3600" b="1">
-                <a:solidFill>
-                  <a:srgbClr val="64B4FF"/>
+              <a:defRPr sz="3400" b="1" i="0">
+                <a:solidFill>
+                  <a:srgbClr val="5AAAFF"/>
                 </a:solidFill>
                 <a:latin typeface="Calibri"/>
               </a:defRPr>
@@ -3661,14 +4224,101 @@
       </p:sp>
       <p:sp>
         <p:nvSpPr>
-          <p:cNvPr id="3" name="TextBox 2"/>
+          <p:cNvPr id="4" name="Rectangle 3"/>
+          <p:cNvSpPr/>
+          <p:nvPr/>
+        </p:nvSpPr>
+        <p:spPr>
+          <a:xfrm>
+            <a:off x="731520" y="1051560"/>
+            <a:ext cx="2286000" cy="25400"/>
+          </a:xfrm>
+          <a:prstGeom prst="rect">
+            <a:avLst/>
+          </a:prstGeom>
+          <a:solidFill>
+            <a:srgbClr val="5AAAFF"/>
+          </a:solidFill>
+          <a:ln>
+            <a:noFill/>
+          </a:ln>
+          <a:effectLst/>
+        </p:spPr>
+        <p:style>
+          <a:lnRef idx="1">
+            <a:schemeClr val="accent1"/>
+          </a:lnRef>
+          <a:fillRef idx="3">
+            <a:schemeClr val="accent1"/>
+          </a:fillRef>
+          <a:effectRef idx="2">
+            <a:schemeClr val="accent1"/>
+          </a:effectRef>
+          <a:fontRef idx="minor">
+            <a:schemeClr val="lt1"/>
+          </a:fontRef>
+        </p:style>
+        <p:txBody>
+          <a:bodyPr rtlCol="0" anchor="ctr"/>
+          <a:lstStyle/>
+          <a:p>
+            <a:pPr algn="ctr"/>
+          </a:p>
+        </p:txBody>
+      </p:sp>
+      <p:sp>
+        <p:nvSpPr>
+          <p:cNvPr id="5" name="Rounded Rectangle 4"/>
+          <p:cNvSpPr/>
+          <p:nvPr/>
+        </p:nvSpPr>
+        <p:spPr>
+          <a:xfrm>
+            <a:off x="548640" y="1463040"/>
+            <a:ext cx="10972800" cy="731520"/>
+          </a:xfrm>
+          <a:prstGeom prst="roundRect">
+            <a:avLst/>
+          </a:prstGeom>
+          <a:solidFill>
+            <a:srgbClr val="10122D"/>
+          </a:solidFill>
+          <a:ln>
+            <a:noFill/>
+          </a:ln>
+        </p:spPr>
+        <p:style>
+          <a:lnRef idx="1">
+            <a:schemeClr val="accent1"/>
+          </a:lnRef>
+          <a:fillRef idx="3">
+            <a:schemeClr val="accent1"/>
+          </a:fillRef>
+          <a:effectRef idx="2">
+            <a:schemeClr val="accent1"/>
+          </a:effectRef>
+          <a:fontRef idx="minor">
+            <a:schemeClr val="lt1"/>
+          </a:fontRef>
+        </p:style>
+        <p:txBody>
+          <a:bodyPr rtlCol="0" anchor="ctr"/>
+          <a:lstStyle/>
+          <a:p>
+            <a:pPr algn="ctr"/>
+          </a:p>
+        </p:txBody>
+      </p:sp>
+      <p:sp>
+        <p:nvSpPr>
+          <p:cNvPr id="6" name="TextBox 5"/>
           <p:cNvSpPr txBox="1"/>
           <p:nvPr/>
         </p:nvSpPr>
         <p:spPr>
           <a:xfrm>
-            <a:off x="731520" y="1463040"/>
-            <a:ext cx="3657600" cy="457200"/>
+            <a:off x="822960" y="1554480"/>
+            <a:ext cx="3474720" cy="548640"/>
           </a:xfrm>
           <a:prstGeom prst="rect">
             <a:avLst/>
@@ -3682,9 +4332,9 @@
           <a:lstStyle/>
           <a:p>
             <a:pPr algn="l">
-              <a:defRPr sz="1800" b="1">
-                <a:solidFill>
-                  <a:srgbClr val="FFFFFF"/>
+              <a:defRPr sz="1700" b="1" i="0">
+                <a:solidFill>
+                  <a:srgbClr val="FAFAFF"/>
                 </a:solidFill>
                 <a:latin typeface="Calibri"/>
               </a:defRPr>
@@ -3697,14 +4347,69 @@
       </p:sp>
       <p:sp>
         <p:nvSpPr>
-          <p:cNvPr id="4" name="TextBox 3"/>
+          <p:cNvPr id="7" name="Rounded Rectangle 6"/>
+          <p:cNvSpPr/>
+          <p:nvPr/>
+        </p:nvSpPr>
+        <p:spPr>
+          <a:xfrm>
+            <a:off x="4480560" y="1554480"/>
+            <a:ext cx="1097280" cy="502920"/>
+          </a:xfrm>
+          <a:prstGeom prst="roundRect">
+            <a:avLst/>
+          </a:prstGeom>
+          <a:solidFill>
+            <a:srgbClr val="28230F"/>
+          </a:solidFill>
+          <a:ln w="12700">
+            <a:solidFill>
+              <a:srgbClr val="FFC33C"/>
+            </a:solidFill>
+          </a:ln>
+        </p:spPr>
+        <p:style>
+          <a:lnRef idx="1">
+            <a:schemeClr val="accent1"/>
+          </a:lnRef>
+          <a:fillRef idx="3">
+            <a:schemeClr val="accent1"/>
+          </a:fillRef>
+          <a:effectRef idx="2">
+            <a:schemeClr val="accent1"/>
+          </a:effectRef>
+          <a:fontRef idx="minor">
+            <a:schemeClr val="lt1"/>
+          </a:fontRef>
+        </p:style>
+        <p:txBody>
+          <a:bodyPr rtlCol="0" anchor="ctr"/>
+          <a:lstStyle/>
+          <a:p>
+            <a:pPr algn="ctr">
+              <a:defRPr sz="1600" b="1">
+                <a:solidFill>
+                  <a:srgbClr val="FFC33C"/>
+                </a:solidFill>
+                <a:latin typeface="Calibri"/>
+              </a:defRPr>
+            </a:pPr>
+            <a:r>
+              <a:t>9/10</a:t>
+            </a:r>
+          </a:p>
+        </p:txBody>
+      </p:sp>
+      <p:sp>
+        <p:nvSpPr>
+          <p:cNvPr id="8" name="TextBox 7"/>
           <p:cNvSpPr txBox="1"/>
           <p:nvPr/>
         </p:nvSpPr>
         <p:spPr>
           <a:xfrm>
-            <a:off x="4572000" y="1463040"/>
-            <a:ext cx="1371600" cy="457200"/>
+            <a:off x="5852160" y="1554480"/>
+            <a:ext cx="5669280" cy="548640"/>
           </a:xfrm>
           <a:prstGeom prst="rect">
             <a:avLst/>
@@ -3717,30 +4422,73 @@
           </a:bodyPr>
           <a:lstStyle/>
           <a:p>
-            <a:pPr algn="ctr">
-              <a:defRPr sz="1800" b="1">
-                <a:solidFill>
-                  <a:srgbClr val="FFC850"/>
-                </a:solidFill>
-                <a:latin typeface="Calibri"/>
-              </a:defRPr>
-            </a:pPr>
-            <a:r>
-              <a:t>9 / 10</a:t>
-            </a:r>
-          </a:p>
-        </p:txBody>
-      </p:sp>
-      <p:sp>
-        <p:nvSpPr>
-          <p:cNvPr id="5" name="TextBox 4"/>
+            <a:pPr algn="l">
+              <a:defRPr sz="1500" b="0" i="0">
+                <a:solidFill>
+                  <a:srgbClr val="969BB4"/>
+                </a:solidFill>
+                <a:latin typeface="Calibri Light"/>
+              </a:defRPr>
+            </a:pPr>
+            <a:r>
+              <a:t>Thorne's physics are real; ending stretches deliberately</a:t>
+            </a:r>
+          </a:p>
+        </p:txBody>
+      </p:sp>
+      <p:sp>
+        <p:nvSpPr>
+          <p:cNvPr id="9" name="Rounded Rectangle 8"/>
+          <p:cNvSpPr/>
+          <p:nvPr/>
+        </p:nvSpPr>
+        <p:spPr>
+          <a:xfrm>
+            <a:off x="548640" y="2377440"/>
+            <a:ext cx="10972800" cy="731520"/>
+          </a:xfrm>
+          <a:prstGeom prst="roundRect">
+            <a:avLst/>
+          </a:prstGeom>
+          <a:solidFill>
+            <a:srgbClr val="0C0E26"/>
+          </a:solidFill>
+          <a:ln>
+            <a:noFill/>
+          </a:ln>
+        </p:spPr>
+        <p:style>
+          <a:lnRef idx="1">
+            <a:schemeClr val="accent1"/>
+          </a:lnRef>
+          <a:fillRef idx="3">
+            <a:schemeClr val="accent1"/>
+          </a:fillRef>
+          <a:effectRef idx="2">
+            <a:schemeClr val="accent1"/>
+          </a:effectRef>
+          <a:fontRef idx="minor">
+            <a:schemeClr val="lt1"/>
+          </a:fontRef>
+        </p:style>
+        <p:txBody>
+          <a:bodyPr rtlCol="0" anchor="ctr"/>
+          <a:lstStyle/>
+          <a:p>
+            <a:pPr algn="ctr"/>
+          </a:p>
+        </p:txBody>
+      </p:sp>
+      <p:sp>
+        <p:nvSpPr>
+          <p:cNvPr id="10" name="TextBox 9"/>
           <p:cNvSpPr txBox="1"/>
           <p:nvPr/>
         </p:nvSpPr>
         <p:spPr>
           <a:xfrm>
-            <a:off x="6217920" y="1463040"/>
-            <a:ext cx="5486400" cy="457200"/>
+            <a:off x="822960" y="2468880"/>
+            <a:ext cx="3474720" cy="548640"/>
           </a:xfrm>
           <a:prstGeom prst="rect">
             <a:avLst/>
@@ -3754,29 +4502,84 @@
           <a:lstStyle/>
           <a:p>
             <a:pPr algn="l">
-              <a:defRPr sz="1500" b="0">
-                <a:solidFill>
-                  <a:srgbClr val="AAAABE"/>
+              <a:defRPr sz="1700" b="1" i="0">
+                <a:solidFill>
+                  <a:srgbClr val="FAFAFF"/>
                 </a:solidFill>
                 <a:latin typeface="Calibri"/>
               </a:defRPr>
             </a:pPr>
             <a:r>
-              <a:t>Kip Thorne's physics are real; ending stretches deliberately</a:t>
-            </a:r>
-          </a:p>
-        </p:txBody>
-      </p:sp>
-      <p:sp>
-        <p:nvSpPr>
-          <p:cNvPr id="6" name="TextBox 5"/>
+              <a:t>"What If" Quality</a:t>
+            </a:r>
+          </a:p>
+        </p:txBody>
+      </p:sp>
+      <p:sp>
+        <p:nvSpPr>
+          <p:cNvPr id="11" name="Rounded Rectangle 10"/>
+          <p:cNvSpPr/>
+          <p:nvPr/>
+        </p:nvSpPr>
+        <p:spPr>
+          <a:xfrm>
+            <a:off x="4480560" y="2468880"/>
+            <a:ext cx="1097280" cy="502920"/>
+          </a:xfrm>
+          <a:prstGeom prst="roundRect">
+            <a:avLst/>
+          </a:prstGeom>
+          <a:solidFill>
+            <a:srgbClr val="28230F"/>
+          </a:solidFill>
+          <a:ln w="12700">
+            <a:solidFill>
+              <a:srgbClr val="FFC33C"/>
+            </a:solidFill>
+          </a:ln>
+        </p:spPr>
+        <p:style>
+          <a:lnRef idx="1">
+            <a:schemeClr val="accent1"/>
+          </a:lnRef>
+          <a:fillRef idx="3">
+            <a:schemeClr val="accent1"/>
+          </a:fillRef>
+          <a:effectRef idx="2">
+            <a:schemeClr val="accent1"/>
+          </a:effectRef>
+          <a:fontRef idx="minor">
+            <a:schemeClr val="lt1"/>
+          </a:fontRef>
+        </p:style>
+        <p:txBody>
+          <a:bodyPr rtlCol="0" anchor="ctr"/>
+          <a:lstStyle/>
+          <a:p>
+            <a:pPr algn="ctr">
+              <a:defRPr sz="1600" b="1">
+                <a:solidFill>
+                  <a:srgbClr val="FFC33C"/>
+                </a:solidFill>
+                <a:latin typeface="Calibri"/>
+              </a:defRPr>
+            </a:pPr>
+            <a:r>
+              <a:t>8/10</a:t>
+            </a:r>
+          </a:p>
+        </p:txBody>
+      </p:sp>
+      <p:sp>
+        <p:nvSpPr>
+          <p:cNvPr id="12" name="TextBox 11"/>
           <p:cNvSpPr txBox="1"/>
           <p:nvPr/>
         </p:nvSpPr>
         <p:spPr>
           <a:xfrm>
-            <a:off x="731520" y="2468880"/>
-            <a:ext cx="3657600" cy="457200"/>
+            <a:off x="5852160" y="2468880"/>
+            <a:ext cx="5669280" cy="548640"/>
           </a:xfrm>
           <a:prstGeom prst="rect">
             <a:avLst/>
@@ -3790,29 +4593,72 @@
           <a:lstStyle/>
           <a:p>
             <a:pPr algn="l">
-              <a:defRPr sz="1800" b="1">
-                <a:solidFill>
-                  <a:srgbClr val="FFFFFF"/>
-                </a:solidFill>
-                <a:latin typeface="Calibri"/>
-              </a:defRPr>
-            </a:pPr>
-            <a:r>
-              <a:t>"What If" Quality</a:t>
-            </a:r>
-          </a:p>
-        </p:txBody>
-      </p:sp>
-      <p:sp>
-        <p:nvSpPr>
-          <p:cNvPr id="7" name="TextBox 6"/>
+              <a:defRPr sz="1500" b="0" i="0">
+                <a:solidFill>
+                  <a:srgbClr val="969BB4"/>
+                </a:solidFill>
+                <a:latin typeface="Calibri Light"/>
+              </a:defRPr>
+            </a:pPr>
+            <a:r>
+              <a:t>Genuinely plausible, more immediate than most sci-fi</a:t>
+            </a:r>
+          </a:p>
+        </p:txBody>
+      </p:sp>
+      <p:sp>
+        <p:nvSpPr>
+          <p:cNvPr id="13" name="Rounded Rectangle 12"/>
+          <p:cNvSpPr/>
+          <p:nvPr/>
+        </p:nvSpPr>
+        <p:spPr>
+          <a:xfrm>
+            <a:off x="548640" y="3291840"/>
+            <a:ext cx="10972800" cy="731520"/>
+          </a:xfrm>
+          <a:prstGeom prst="roundRect">
+            <a:avLst/>
+          </a:prstGeom>
+          <a:solidFill>
+            <a:srgbClr val="10122D"/>
+          </a:solidFill>
+          <a:ln>
+            <a:noFill/>
+          </a:ln>
+        </p:spPr>
+        <p:style>
+          <a:lnRef idx="1">
+            <a:schemeClr val="accent1"/>
+          </a:lnRef>
+          <a:fillRef idx="3">
+            <a:schemeClr val="accent1"/>
+          </a:fillRef>
+          <a:effectRef idx="2">
+            <a:schemeClr val="accent1"/>
+          </a:effectRef>
+          <a:fontRef idx="minor">
+            <a:schemeClr val="lt1"/>
+          </a:fontRef>
+        </p:style>
+        <p:txBody>
+          <a:bodyPr rtlCol="0" anchor="ctr"/>
+          <a:lstStyle/>
+          <a:p>
+            <a:pPr algn="ctr"/>
+          </a:p>
+        </p:txBody>
+      </p:sp>
+      <p:sp>
+        <p:nvSpPr>
+          <p:cNvPr id="14" name="TextBox 13"/>
           <p:cNvSpPr txBox="1"/>
           <p:nvPr/>
         </p:nvSpPr>
         <p:spPr>
           <a:xfrm>
-            <a:off x="4572000" y="2468880"/>
-            <a:ext cx="1371600" cy="457200"/>
+            <a:off x="822960" y="3383280"/>
+            <a:ext cx="3474720" cy="548640"/>
           </a:xfrm>
           <a:prstGeom prst="rect">
             <a:avLst/>
@@ -3825,30 +4671,85 @@
           </a:bodyPr>
           <a:lstStyle/>
           <a:p>
+            <a:pPr algn="l">
+              <a:defRPr sz="1700" b="1" i="0">
+                <a:solidFill>
+                  <a:srgbClr val="FAFAFF"/>
+                </a:solidFill>
+                <a:latin typeface="Calibri"/>
+              </a:defRPr>
+            </a:pPr>
+            <a:r>
+              <a:t>Science as Plot Engine</a:t>
+            </a:r>
+          </a:p>
+        </p:txBody>
+      </p:sp>
+      <p:sp>
+        <p:nvSpPr>
+          <p:cNvPr id="15" name="Rounded Rectangle 14"/>
+          <p:cNvSpPr/>
+          <p:nvPr/>
+        </p:nvSpPr>
+        <p:spPr>
+          <a:xfrm>
+            <a:off x="4480560" y="3383280"/>
+            <a:ext cx="1097280" cy="502920"/>
+          </a:xfrm>
+          <a:prstGeom prst="roundRect">
+            <a:avLst/>
+          </a:prstGeom>
+          <a:solidFill>
+            <a:srgbClr val="28230F"/>
+          </a:solidFill>
+          <a:ln w="12700">
+            <a:solidFill>
+              <a:srgbClr val="FFC33C"/>
+            </a:solidFill>
+          </a:ln>
+        </p:spPr>
+        <p:style>
+          <a:lnRef idx="1">
+            <a:schemeClr val="accent1"/>
+          </a:lnRef>
+          <a:fillRef idx="3">
+            <a:schemeClr val="accent1"/>
+          </a:fillRef>
+          <a:effectRef idx="2">
+            <a:schemeClr val="accent1"/>
+          </a:effectRef>
+          <a:fontRef idx="minor">
+            <a:schemeClr val="lt1"/>
+          </a:fontRef>
+        </p:style>
+        <p:txBody>
+          <a:bodyPr rtlCol="0" anchor="ctr"/>
+          <a:lstStyle/>
+          <a:p>
             <a:pPr algn="ctr">
-              <a:defRPr sz="1800" b="1">
-                <a:solidFill>
-                  <a:srgbClr val="FFC850"/>
+              <a:defRPr sz="1600" b="1">
+                <a:solidFill>
+                  <a:srgbClr val="FFC33C"/>
                 </a:solidFill>
                 <a:latin typeface="Calibri"/>
               </a:defRPr>
             </a:pPr>
             <a:r>
-              <a:t>8 / 10</a:t>
-            </a:r>
-          </a:p>
-        </p:txBody>
-      </p:sp>
-      <p:sp>
-        <p:nvSpPr>
-          <p:cNvPr id="8" name="TextBox 7"/>
+              <a:t>8/10</a:t>
+            </a:r>
+          </a:p>
+        </p:txBody>
+      </p:sp>
+      <p:sp>
+        <p:nvSpPr>
+          <p:cNvPr id="16" name="TextBox 15"/>
           <p:cNvSpPr txBox="1"/>
           <p:nvPr/>
         </p:nvSpPr>
         <p:spPr>
           <a:xfrm>
-            <a:off x="6217920" y="2468880"/>
-            <a:ext cx="5486400" cy="457200"/>
+            <a:off x="5852160" y="3383280"/>
+            <a:ext cx="5669280" cy="548640"/>
           </a:xfrm>
           <a:prstGeom prst="rect">
             <a:avLst/>
@@ -3862,29 +4763,72 @@
           <a:lstStyle/>
           <a:p>
             <a:pPr algn="l">
-              <a:defRPr sz="1500" b="0">
-                <a:solidFill>
-                  <a:srgbClr val="AAAABE"/>
-                </a:solidFill>
-                <a:latin typeface="Calibri"/>
-              </a:defRPr>
-            </a:pPr>
-            <a:r>
-              <a:t>Genuinely plausible, more immediate than most sci-fi</a:t>
-            </a:r>
-          </a:p>
-        </p:txBody>
-      </p:sp>
-      <p:sp>
-        <p:nvSpPr>
-          <p:cNvPr id="9" name="TextBox 8"/>
+              <a:defRPr sz="1500" b="0" i="0">
+                <a:solidFill>
+                  <a:srgbClr val="969BB4"/>
+                </a:solidFill>
+                <a:latin typeface="Calibri Light"/>
+              </a:defRPr>
+            </a:pPr>
+            <a:r>
+              <a:t>Third act requires understanding gravitational physics</a:t>
+            </a:r>
+          </a:p>
+        </p:txBody>
+      </p:sp>
+      <p:sp>
+        <p:nvSpPr>
+          <p:cNvPr id="17" name="Rounded Rectangle 16"/>
+          <p:cNvSpPr/>
+          <p:nvPr/>
+        </p:nvSpPr>
+        <p:spPr>
+          <a:xfrm>
+            <a:off x="548640" y="4206240"/>
+            <a:ext cx="10972800" cy="731520"/>
+          </a:xfrm>
+          <a:prstGeom prst="roundRect">
+            <a:avLst/>
+          </a:prstGeom>
+          <a:solidFill>
+            <a:srgbClr val="0C0E26"/>
+          </a:solidFill>
+          <a:ln>
+            <a:noFill/>
+          </a:ln>
+        </p:spPr>
+        <p:style>
+          <a:lnRef idx="1">
+            <a:schemeClr val="accent1"/>
+          </a:lnRef>
+          <a:fillRef idx="3">
+            <a:schemeClr val="accent1"/>
+          </a:fillRef>
+          <a:effectRef idx="2">
+            <a:schemeClr val="accent1"/>
+          </a:effectRef>
+          <a:fontRef idx="minor">
+            <a:schemeClr val="lt1"/>
+          </a:fontRef>
+        </p:style>
+        <p:txBody>
+          <a:bodyPr rtlCol="0" anchor="ctr"/>
+          <a:lstStyle/>
+          <a:p>
+            <a:pPr algn="ctr"/>
+          </a:p>
+        </p:txBody>
+      </p:sp>
+      <p:sp>
+        <p:nvSpPr>
+          <p:cNvPr id="18" name="TextBox 17"/>
           <p:cNvSpPr txBox="1"/>
           <p:nvPr/>
         </p:nvSpPr>
         <p:spPr>
           <a:xfrm>
-            <a:off x="731520" y="3474720"/>
-            <a:ext cx="3657600" cy="457200"/>
+            <a:off x="822960" y="4297679"/>
+            <a:ext cx="3474720" cy="548640"/>
           </a:xfrm>
           <a:prstGeom prst="rect">
             <a:avLst/>
@@ -3898,29 +4842,84 @@
           <a:lstStyle/>
           <a:p>
             <a:pPr algn="l">
-              <a:defRPr sz="1800" b="1">
-                <a:solidFill>
-                  <a:srgbClr val="FFFFFF"/>
+              <a:defRPr sz="1700" b="1" i="0">
+                <a:solidFill>
+                  <a:srgbClr val="FAFAFF"/>
                 </a:solidFill>
                 <a:latin typeface="Calibri"/>
               </a:defRPr>
             </a:pPr>
             <a:r>
-              <a:t>Science as Plot Engine</a:t>
-            </a:r>
-          </a:p>
-        </p:txBody>
-      </p:sp>
-      <p:sp>
-        <p:nvSpPr>
-          <p:cNvPr id="10" name="TextBox 9"/>
+              <a:t>Genre Hallmarks</a:t>
+            </a:r>
+          </a:p>
+        </p:txBody>
+      </p:sp>
+      <p:sp>
+        <p:nvSpPr>
+          <p:cNvPr id="19" name="Rounded Rectangle 18"/>
+          <p:cNvSpPr/>
+          <p:nvPr/>
+        </p:nvSpPr>
+        <p:spPr>
+          <a:xfrm>
+            <a:off x="4480560" y="4297679"/>
+            <a:ext cx="1097280" cy="502920"/>
+          </a:xfrm>
+          <a:prstGeom prst="roundRect">
+            <a:avLst/>
+          </a:prstGeom>
+          <a:solidFill>
+            <a:srgbClr val="28230F"/>
+          </a:solidFill>
+          <a:ln w="12700">
+            <a:solidFill>
+              <a:srgbClr val="FFC33C"/>
+            </a:solidFill>
+          </a:ln>
+        </p:spPr>
+        <p:style>
+          <a:lnRef idx="1">
+            <a:schemeClr val="accent1"/>
+          </a:lnRef>
+          <a:fillRef idx="3">
+            <a:schemeClr val="accent1"/>
+          </a:fillRef>
+          <a:effectRef idx="2">
+            <a:schemeClr val="accent1"/>
+          </a:effectRef>
+          <a:fontRef idx="minor">
+            <a:schemeClr val="lt1"/>
+          </a:fontRef>
+        </p:style>
+        <p:txBody>
+          <a:bodyPr rtlCol="0" anchor="ctr"/>
+          <a:lstStyle/>
+          <a:p>
+            <a:pPr algn="ctr">
+              <a:defRPr sz="1600" b="1">
+                <a:solidFill>
+                  <a:srgbClr val="FFC33C"/>
+                </a:solidFill>
+                <a:latin typeface="Calibri"/>
+              </a:defRPr>
+            </a:pPr>
+            <a:r>
+              <a:t>9/10</a:t>
+            </a:r>
+          </a:p>
+        </p:txBody>
+      </p:sp>
+      <p:sp>
+        <p:nvSpPr>
+          <p:cNvPr id="20" name="TextBox 19"/>
           <p:cNvSpPr txBox="1"/>
           <p:nvPr/>
         </p:nvSpPr>
         <p:spPr>
           <a:xfrm>
-            <a:off x="4572000" y="3474720"/>
-            <a:ext cx="1371600" cy="457200"/>
+            <a:off x="5852160" y="4297679"/>
+            <a:ext cx="5669280" cy="548640"/>
           </a:xfrm>
           <a:prstGeom prst="rect">
             <a:avLst/>
@@ -3933,30 +4932,73 @@
           </a:bodyPr>
           <a:lstStyle/>
           <a:p>
-            <a:pPr algn="ctr">
-              <a:defRPr sz="1800" b="1">
-                <a:solidFill>
-                  <a:srgbClr val="FFC850"/>
-                </a:solidFill>
-                <a:latin typeface="Calibri"/>
-              </a:defRPr>
-            </a:pPr>
-            <a:r>
-              <a:t>8 / 10</a:t>
-            </a:r>
-          </a:p>
-        </p:txBody>
-      </p:sp>
-      <p:sp>
-        <p:nvSpPr>
-          <p:cNvPr id="11" name="TextBox 10"/>
+            <a:pPr algn="l">
+              <a:defRPr sz="1500" b="0" i="0">
+                <a:solidFill>
+                  <a:srgbClr val="969BB4"/>
+                </a:solidFill>
+                <a:latin typeface="Calibri Light"/>
+              </a:defRPr>
+            </a:pPr>
+            <a:r>
+              <a:t>Isolated protagonist, social critique, plausible premise</a:t>
+            </a:r>
+          </a:p>
+        </p:txBody>
+      </p:sp>
+      <p:sp>
+        <p:nvSpPr>
+          <p:cNvPr id="21" name="Rounded Rectangle 20"/>
+          <p:cNvSpPr/>
+          <p:nvPr/>
+        </p:nvSpPr>
+        <p:spPr>
+          <a:xfrm>
+            <a:off x="548640" y="5120640"/>
+            <a:ext cx="10972800" cy="731520"/>
+          </a:xfrm>
+          <a:prstGeom prst="roundRect">
+            <a:avLst/>
+          </a:prstGeom>
+          <a:solidFill>
+            <a:srgbClr val="10122D"/>
+          </a:solidFill>
+          <a:ln>
+            <a:noFill/>
+          </a:ln>
+        </p:spPr>
+        <p:style>
+          <a:lnRef idx="1">
+            <a:schemeClr val="accent1"/>
+          </a:lnRef>
+          <a:fillRef idx="3">
+            <a:schemeClr val="accent1"/>
+          </a:fillRef>
+          <a:effectRef idx="2">
+            <a:schemeClr val="accent1"/>
+          </a:effectRef>
+          <a:fontRef idx="minor">
+            <a:schemeClr val="lt1"/>
+          </a:fontRef>
+        </p:style>
+        <p:txBody>
+          <a:bodyPr rtlCol="0" anchor="ctr"/>
+          <a:lstStyle/>
+          <a:p>
+            <a:pPr algn="ctr"/>
+          </a:p>
+        </p:txBody>
+      </p:sp>
+      <p:sp>
+        <p:nvSpPr>
+          <p:cNvPr id="22" name="TextBox 21"/>
           <p:cNvSpPr txBox="1"/>
           <p:nvPr/>
         </p:nvSpPr>
         <p:spPr>
           <a:xfrm>
-            <a:off x="6217920" y="3474720"/>
-            <a:ext cx="5486400" cy="457200"/>
+            <a:off x="822960" y="5212079"/>
+            <a:ext cx="3474720" cy="548640"/>
           </a:xfrm>
           <a:prstGeom prst="rect">
             <a:avLst/>
@@ -3970,29 +5012,84 @@
           <a:lstStyle/>
           <a:p>
             <a:pPr algn="l">
-              <a:defRPr sz="1500" b="0">
-                <a:solidFill>
-                  <a:srgbClr val="AAAABE"/>
+              <a:defRPr sz="1700" b="1" i="0">
+                <a:solidFill>
+                  <a:srgbClr val="FAFAFF"/>
                 </a:solidFill>
                 <a:latin typeface="Calibri"/>
               </a:defRPr>
             </a:pPr>
             <a:r>
-              <a:t>Third act requires understanding gravitational physics</a:t>
-            </a:r>
-          </a:p>
-        </p:txBody>
-      </p:sp>
-      <p:sp>
-        <p:nvSpPr>
-          <p:cNvPr id="12" name="TextBox 11"/>
+              <a:t>Watchability</a:t>
+            </a:r>
+          </a:p>
+        </p:txBody>
+      </p:sp>
+      <p:sp>
+        <p:nvSpPr>
+          <p:cNvPr id="23" name="Rounded Rectangle 22"/>
+          <p:cNvSpPr/>
+          <p:nvPr/>
+        </p:nvSpPr>
+        <p:spPr>
+          <a:xfrm>
+            <a:off x="4480560" y="5212079"/>
+            <a:ext cx="1097280" cy="502920"/>
+          </a:xfrm>
+          <a:prstGeom prst="roundRect">
+            <a:avLst/>
+          </a:prstGeom>
+          <a:solidFill>
+            <a:srgbClr val="28230F"/>
+          </a:solidFill>
+          <a:ln w="12700">
+            <a:solidFill>
+              <a:srgbClr val="FFC33C"/>
+            </a:solidFill>
+          </a:ln>
+        </p:spPr>
+        <p:style>
+          <a:lnRef idx="1">
+            <a:schemeClr val="accent1"/>
+          </a:lnRef>
+          <a:fillRef idx="3">
+            <a:schemeClr val="accent1"/>
+          </a:fillRef>
+          <a:effectRef idx="2">
+            <a:schemeClr val="accent1"/>
+          </a:effectRef>
+          <a:fontRef idx="minor">
+            <a:schemeClr val="lt1"/>
+          </a:fontRef>
+        </p:style>
+        <p:txBody>
+          <a:bodyPr rtlCol="0" anchor="ctr"/>
+          <a:lstStyle/>
+          <a:p>
+            <a:pPr algn="ctr">
+              <a:defRPr sz="1600" b="1">
+                <a:solidFill>
+                  <a:srgbClr val="FFC33C"/>
+                </a:solidFill>
+                <a:latin typeface="Calibri"/>
+              </a:defRPr>
+            </a:pPr>
+            <a:r>
+              <a:t>9/10</a:t>
+            </a:r>
+          </a:p>
+        </p:txBody>
+      </p:sp>
+      <p:sp>
+        <p:nvSpPr>
+          <p:cNvPr id="24" name="TextBox 23"/>
           <p:cNvSpPr txBox="1"/>
           <p:nvPr/>
         </p:nvSpPr>
         <p:spPr>
           <a:xfrm>
-            <a:off x="731520" y="4480560"/>
-            <a:ext cx="3657600" cy="457200"/>
+            <a:off x="5852160" y="5212079"/>
+            <a:ext cx="5669280" cy="548640"/>
           </a:xfrm>
           <a:prstGeom prst="rect">
             <a:avLst/>
@@ -4006,191 +5103,11 @@
           <a:lstStyle/>
           <a:p>
             <a:pPr algn="l">
-              <a:defRPr sz="1800" b="1">
-                <a:solidFill>
-                  <a:srgbClr val="FFFFFF"/>
-                </a:solidFill>
-                <a:latin typeface="Calibri"/>
-              </a:defRPr>
-            </a:pPr>
-            <a:r>
-              <a:t>Genre Hallmarks</a:t>
-            </a:r>
-          </a:p>
-        </p:txBody>
-      </p:sp>
-      <p:sp>
-        <p:nvSpPr>
-          <p:cNvPr id="13" name="TextBox 12"/>
-          <p:cNvSpPr txBox="1"/>
-          <p:nvPr/>
-        </p:nvSpPr>
-        <p:spPr>
-          <a:xfrm>
-            <a:off x="4572000" y="4480560"/>
-            <a:ext cx="1371600" cy="457200"/>
-          </a:xfrm>
-          <a:prstGeom prst="rect">
-            <a:avLst/>
-          </a:prstGeom>
-          <a:noFill/>
-        </p:spPr>
-        <p:txBody>
-          <a:bodyPr wrap="square">
-            <a:spAutoFit/>
-          </a:bodyPr>
-          <a:lstStyle/>
-          <a:p>
-            <a:pPr algn="ctr">
-              <a:defRPr sz="1800" b="1">
-                <a:solidFill>
-                  <a:srgbClr val="FFC850"/>
-                </a:solidFill>
-                <a:latin typeface="Calibri"/>
-              </a:defRPr>
-            </a:pPr>
-            <a:r>
-              <a:t>9 / 10</a:t>
-            </a:r>
-          </a:p>
-        </p:txBody>
-      </p:sp>
-      <p:sp>
-        <p:nvSpPr>
-          <p:cNvPr id="14" name="TextBox 13"/>
-          <p:cNvSpPr txBox="1"/>
-          <p:nvPr/>
-        </p:nvSpPr>
-        <p:spPr>
-          <a:xfrm>
-            <a:off x="6217920" y="4480560"/>
-            <a:ext cx="5486400" cy="457200"/>
-          </a:xfrm>
-          <a:prstGeom prst="rect">
-            <a:avLst/>
-          </a:prstGeom>
-          <a:noFill/>
-        </p:spPr>
-        <p:txBody>
-          <a:bodyPr wrap="square">
-            <a:spAutoFit/>
-          </a:bodyPr>
-          <a:lstStyle/>
-          <a:p>
-            <a:pPr algn="l">
-              <a:defRPr sz="1500" b="0">
-                <a:solidFill>
-                  <a:srgbClr val="AAAABE"/>
-                </a:solidFill>
-                <a:latin typeface="Calibri"/>
-              </a:defRPr>
-            </a:pPr>
-            <a:r>
-              <a:t>Isolated protagonist, social critique, plausible premise</a:t>
-            </a:r>
-          </a:p>
-        </p:txBody>
-      </p:sp>
-      <p:sp>
-        <p:nvSpPr>
-          <p:cNvPr id="15" name="TextBox 14"/>
-          <p:cNvSpPr txBox="1"/>
-          <p:nvPr/>
-        </p:nvSpPr>
-        <p:spPr>
-          <a:xfrm>
-            <a:off x="731520" y="5486400"/>
-            <a:ext cx="3657600" cy="457200"/>
-          </a:xfrm>
-          <a:prstGeom prst="rect">
-            <a:avLst/>
-          </a:prstGeom>
-          <a:noFill/>
-        </p:spPr>
-        <p:txBody>
-          <a:bodyPr wrap="square">
-            <a:spAutoFit/>
-          </a:bodyPr>
-          <a:lstStyle/>
-          <a:p>
-            <a:pPr algn="l">
-              <a:defRPr sz="1800" b="1">
-                <a:solidFill>
-                  <a:srgbClr val="FFFFFF"/>
-                </a:solidFill>
-                <a:latin typeface="Calibri"/>
-              </a:defRPr>
-            </a:pPr>
-            <a:r>
-              <a:t>Watchability</a:t>
-            </a:r>
-          </a:p>
-        </p:txBody>
-      </p:sp>
-      <p:sp>
-        <p:nvSpPr>
-          <p:cNvPr id="16" name="TextBox 15"/>
-          <p:cNvSpPr txBox="1"/>
-          <p:nvPr/>
-        </p:nvSpPr>
-        <p:spPr>
-          <a:xfrm>
-            <a:off x="4572000" y="5486400"/>
-            <a:ext cx="1371600" cy="457200"/>
-          </a:xfrm>
-          <a:prstGeom prst="rect">
-            <a:avLst/>
-          </a:prstGeom>
-          <a:noFill/>
-        </p:spPr>
-        <p:txBody>
-          <a:bodyPr wrap="square">
-            <a:spAutoFit/>
-          </a:bodyPr>
-          <a:lstStyle/>
-          <a:p>
-            <a:pPr algn="ctr">
-              <a:defRPr sz="1800" b="1">
-                <a:solidFill>
-                  <a:srgbClr val="FFC850"/>
-                </a:solidFill>
-                <a:latin typeface="Calibri"/>
-              </a:defRPr>
-            </a:pPr>
-            <a:r>
-              <a:t>9 / 10</a:t>
-            </a:r>
-          </a:p>
-        </p:txBody>
-      </p:sp>
-      <p:sp>
-        <p:nvSpPr>
-          <p:cNvPr id="17" name="TextBox 16"/>
-          <p:cNvSpPr txBox="1"/>
-          <p:nvPr/>
-        </p:nvSpPr>
-        <p:spPr>
-          <a:xfrm>
-            <a:off x="6217920" y="5486400"/>
-            <a:ext cx="5486400" cy="457200"/>
-          </a:xfrm>
-          <a:prstGeom prst="rect">
-            <a:avLst/>
-          </a:prstGeom>
-          <a:noFill/>
-        </p:spPr>
-        <p:txBody>
-          <a:bodyPr wrap="square">
-            <a:spAutoFit/>
-          </a:bodyPr>
-          <a:lstStyle/>
-          <a:p>
-            <a:pPr algn="l">
-              <a:defRPr sz="1500" b="0">
-                <a:solidFill>
-                  <a:srgbClr val="AAAABE"/>
-                </a:solidFill>
-                <a:latin typeface="Calibri"/>
+              <a:defRPr sz="1500" b="0" i="0">
+                <a:solidFill>
+                  <a:srgbClr val="969BB4"/>
+                </a:solidFill>
+                <a:latin typeface="Calibri Light"/>
               </a:defRPr>
             </a:pPr>
             <a:r>
@@ -4201,32 +5118,51 @@
       </p:sp>
       <p:sp>
         <p:nvSpPr>
-          <p:cNvPr id="18" name="TextBox 17"/>
-          <p:cNvSpPr txBox="1"/>
-          <p:nvPr/>
-        </p:nvSpPr>
-        <p:spPr>
-          <a:xfrm>
-            <a:off x="731520" y="6035040"/>
-            <a:ext cx="10515600" cy="548640"/>
-          </a:xfrm>
-          <a:prstGeom prst="rect">
-            <a:avLst/>
-          </a:prstGeom>
-          <a:noFill/>
-        </p:spPr>
-        <p:txBody>
-          <a:bodyPr wrap="square">
-            <a:spAutoFit/>
-          </a:bodyPr>
+          <p:cNvPr id="25" name="Rounded Rectangle 24"/>
+          <p:cNvSpPr/>
+          <p:nvPr/>
+        </p:nvSpPr>
+        <p:spPr>
+          <a:xfrm>
+            <a:off x="2286000" y="5943600"/>
+            <a:ext cx="7589520" cy="685800"/>
+          </a:xfrm>
+          <a:prstGeom prst="roundRect">
+            <a:avLst/>
+          </a:prstGeom>
+          <a:solidFill>
+            <a:srgbClr val="19160A"/>
+          </a:solidFill>
+          <a:ln w="25400">
+            <a:solidFill>
+              <a:srgbClr val="FFC33C"/>
+            </a:solidFill>
+          </a:ln>
+        </p:spPr>
+        <p:style>
+          <a:lnRef idx="1">
+            <a:schemeClr val="accent1"/>
+          </a:lnRef>
+          <a:fillRef idx="3">
+            <a:schemeClr val="accent1"/>
+          </a:fillRef>
+          <a:effectRef idx="2">
+            <a:schemeClr val="accent1"/>
+          </a:effectRef>
+          <a:fontRef idx="minor">
+            <a:schemeClr val="lt1"/>
+          </a:fontRef>
+        </p:style>
+        <p:txBody>
+          <a:bodyPr rtlCol="0" anchor="ctr"/>
           <a:lstStyle/>
           <a:p>
             <a:pPr algn="ctr">
               <a:defRPr sz="2200" b="1">
                 <a:solidFill>
-                  <a:srgbClr val="FFC850"/>
-                </a:solidFill>
-                <a:latin typeface="Calibri"/>
+                  <a:srgbClr val="FFC33C"/>
+                </a:solidFill>
+                <a:latin typeface="Calibri Light"/>
               </a:defRPr>
             </a:pPr>
             <a:r>
@@ -4240,6 +5176,9 @@
   <p:clrMapOvr>
     <a:masterClrMapping/>
   </p:clrMapOvr>
+  <p:transition xmlns:ns0="http://schemas.microsoft.com/office/powerpoint/2010/main" spd="med" ns0:dur="900">
+    <p:split orient="horz" dir="out"/>
+  </p:transition>
 </p:sld>
 </file>
 
@@ -4249,7 +5188,7 @@
     <p:bg>
       <p:bgPr>
         <a:solidFill>
-          <a:srgbClr val="0A0A1E"/>
+          <a:srgbClr val="08081C"/>
         </a:solidFill>
         <a:effectLst/>
       </p:bgPr>
@@ -4263,7 +5202,52 @@
       <p:grpSpPr/>
       <p:sp>
         <p:nvSpPr>
-          <p:cNvPr id="2" name="TextBox 1"/>
+          <p:cNvPr id="2" name="Oval 1"/>
+          <p:cNvSpPr/>
+          <p:nvPr/>
+        </p:nvSpPr>
+        <p:spPr>
+          <a:xfrm>
+            <a:off x="9601200" y="-1371600"/>
+            <a:ext cx="3657600" cy="3657600"/>
+          </a:xfrm>
+          <a:prstGeom prst="ellipse">
+            <a:avLst/>
+          </a:prstGeom>
+          <a:solidFill>
+            <a:srgbClr val="50DCE6">
+              <a:alpha val="6000"/>
+            </a:srgbClr>
+          </a:solidFill>
+          <a:ln>
+            <a:noFill/>
+          </a:ln>
+        </p:spPr>
+        <p:style>
+          <a:lnRef idx="1">
+            <a:schemeClr val="accent1"/>
+          </a:lnRef>
+          <a:fillRef idx="3">
+            <a:schemeClr val="accent1"/>
+          </a:fillRef>
+          <a:effectRef idx="2">
+            <a:schemeClr val="accent1"/>
+          </a:effectRef>
+          <a:fontRef idx="minor">
+            <a:schemeClr val="lt1"/>
+          </a:fontRef>
+        </p:style>
+        <p:txBody>
+          <a:bodyPr rtlCol="0" anchor="ctr"/>
+          <a:lstStyle/>
+          <a:p>
+            <a:pPr algn="ctr"/>
+          </a:p>
+        </p:txBody>
+      </p:sp>
+      <p:sp>
+        <p:nvSpPr>
+          <p:cNvPr id="3" name="TextBox 2"/>
           <p:cNvSpPr txBox="1"/>
           <p:nvPr/>
         </p:nvSpPr>
@@ -4284,9 +5268,9 @@
           <a:lstStyle/>
           <a:p>
             <a:pPr algn="l">
-              <a:defRPr sz="3600" b="1">
-                <a:solidFill>
-                  <a:srgbClr val="64B4FF"/>
+              <a:defRPr sz="3400" b="1" i="0">
+                <a:solidFill>
+                  <a:srgbClr val="5AAAFF"/>
                 </a:solidFill>
                 <a:latin typeface="Calibri"/>
               </a:defRPr>
@@ -4299,14 +5283,113 @@
       </p:sp>
       <p:sp>
         <p:nvSpPr>
-          <p:cNvPr id="3" name="TextBox 2"/>
+          <p:cNvPr id="4" name="Rectangle 3"/>
+          <p:cNvSpPr/>
+          <p:nvPr/>
+        </p:nvSpPr>
+        <p:spPr>
+          <a:xfrm>
+            <a:off x="731520" y="1188720"/>
+            <a:ext cx="3200400" cy="38100"/>
+          </a:xfrm>
+          <a:prstGeom prst="rect">
+            <a:avLst/>
+          </a:prstGeom>
+          <a:solidFill>
+            <a:srgbClr val="5AAAFF"/>
+          </a:solidFill>
+          <a:ln>
+            <a:noFill/>
+          </a:ln>
+          <a:effectLst/>
+        </p:spPr>
+        <p:style>
+          <a:lnRef idx="1">
+            <a:schemeClr val="accent1"/>
+          </a:lnRef>
+          <a:fillRef idx="3">
+            <a:schemeClr val="accent1"/>
+          </a:fillRef>
+          <a:effectRef idx="2">
+            <a:schemeClr val="accent1"/>
+          </a:effectRef>
+          <a:fontRef idx="minor">
+            <a:schemeClr val="lt1"/>
+          </a:fontRef>
+        </p:style>
+        <p:txBody>
+          <a:bodyPr rtlCol="0" anchor="ctr"/>
+          <a:lstStyle/>
+          <a:p>
+            <a:pPr algn="ctr"/>
+          </a:p>
+        </p:txBody>
+      </p:sp>
+      <p:sp>
+        <p:nvSpPr>
+          <p:cNvPr id="5" name="Rounded Rectangle 4"/>
+          <p:cNvSpPr/>
+          <p:nvPr/>
+        </p:nvSpPr>
+        <p:spPr>
+          <a:xfrm>
+            <a:off x="731520" y="1645920"/>
+            <a:ext cx="10515600" cy="1097280"/>
+          </a:xfrm>
+          <a:prstGeom prst="roundRect">
+            <a:avLst/>
+          </a:prstGeom>
+          <a:solidFill>
+            <a:srgbClr val="141937"/>
+          </a:solidFill>
+          <a:ln w="19050">
+            <a:solidFill>
+              <a:srgbClr val="FFC33C"/>
+            </a:solidFill>
+          </a:ln>
+        </p:spPr>
+        <p:style>
+          <a:lnRef idx="1">
+            <a:schemeClr val="accent1"/>
+          </a:lnRef>
+          <a:fillRef idx="3">
+            <a:schemeClr val="accent1"/>
+          </a:fillRef>
+          <a:effectRef idx="2">
+            <a:schemeClr val="accent1"/>
+          </a:effectRef>
+          <a:fontRef idx="minor">
+            <a:schemeClr val="lt1"/>
+          </a:fontRef>
+        </p:style>
+        <p:txBody>
+          <a:bodyPr rtlCol="0" anchor="ctr" wrap="square"/>
+          <a:lstStyle/>
+          <a:p>
+            <a:pPr algn="ctr">
+              <a:defRPr sz="2600" b="1">
+                <a:solidFill>
+                  <a:srgbClr val="FFC33C"/>
+                </a:solidFill>
+                <a:latin typeface="Calibri Light"/>
+              </a:defRPr>
+            </a:pPr>
+            <a:r>
+              <a:t>  The science is the story — not the backdrop.</a:t>
+            </a:r>
+          </a:p>
+        </p:txBody>
+      </p:sp>
+      <p:sp>
+        <p:nvSpPr>
+          <p:cNvPr id="6" name="TextBox 5"/>
           <p:cNvSpPr txBox="1"/>
           <p:nvPr/>
         </p:nvSpPr>
         <p:spPr>
           <a:xfrm>
-            <a:off x="731520" y="1645920"/>
-            <a:ext cx="10515600" cy="4572000"/>
+            <a:off x="1097280" y="3108960"/>
+            <a:ext cx="10058400" cy="3657600"/>
           </a:xfrm>
           <a:prstGeom prst="rect">
             <a:avLst/>
@@ -4320,92 +5403,76 @@
           <a:lstStyle/>
           <a:p>
             <a:pPr algn="l">
-              <a:defRPr sz="2400" b="1">
-                <a:solidFill>
-                  <a:srgbClr val="FFC850"/>
-                </a:solidFill>
-                <a:latin typeface="Calibri"/>
-              </a:defRPr>
-            </a:pPr>
-            <a:r>
-              <a:t>The science is the story — not the backdrop.</a:t>
-            </a:r>
+              <a:defRPr sz="1200" b="0" i="0">
+                <a:solidFill>
+                  <a:srgbClr val="FFFFFF"/>
+                </a:solidFill>
+                <a:latin typeface="Calibri Light"/>
+              </a:defRPr>
+            </a:pPr>
           </a:p>
           <a:p>
             <a:pPr algn="l">
               <a:spcBef>
-                <a:spcPts val="1200"/>
+                <a:spcPts val="1800"/>
               </a:spcBef>
-              <a:defRPr sz="1200" b="0">
-                <a:solidFill>
-                  <a:srgbClr val="FFFFFF"/>
-                </a:solidFill>
-                <a:latin typeface="Calibri"/>
-              </a:defRPr>
-            </a:pPr>
+              <a:defRPr sz="2000" b="0" i="0">
+                <a:solidFill>
+                  <a:srgbClr val="D2D7E6"/>
+                </a:solidFill>
+                <a:latin typeface="Calibri Light"/>
+              </a:defRPr>
+            </a:pPr>
+            <a:r>
+              <a:t>▸  Soft sci-fi uses spaceships and robots as decoration</a:t>
+            </a:r>
           </a:p>
           <a:p>
             <a:pPr algn="l">
               <a:spcBef>
-                <a:spcPts val="1200"/>
+                <a:spcPts val="1800"/>
               </a:spcBef>
-              <a:defRPr sz="2000" b="0">
-                <a:solidFill>
-                  <a:srgbClr val="DCDCE6"/>
-                </a:solidFill>
-                <a:latin typeface="Calibri"/>
-              </a:defRPr>
-            </a:pPr>
-            <a:r>
-              <a:t>• Soft sci-fi uses spaceships and robots as decoration</a:t>
+              <a:defRPr sz="2000" b="0" i="0">
+                <a:solidFill>
+                  <a:srgbClr val="D2D7E6"/>
+                </a:solidFill>
+                <a:latin typeface="Calibri Light"/>
+              </a:defRPr>
+            </a:pPr>
+            <a:r>
+              <a:t>▸  Hard sci-fi: remove the physics or biology → the plot collapses</a:t>
             </a:r>
           </a:p>
           <a:p>
             <a:pPr algn="l">
               <a:spcBef>
-                <a:spcPts val="1200"/>
+                <a:spcPts val="1800"/>
               </a:spcBef>
-              <a:defRPr sz="2000" b="0">
-                <a:solidFill>
-                  <a:srgbClr val="DCDCE6"/>
-                </a:solidFill>
-                <a:latin typeface="Calibri"/>
-              </a:defRPr>
-            </a:pPr>
-            <a:r>
-              <a:t>• Hard sci-fi: remove the physics or biology, and the plot collapses</a:t>
+              <a:defRPr sz="2000" b="0" i="0">
+                <a:solidFill>
+                  <a:srgbClr val="D2D7E6"/>
+                </a:solidFill>
+                <a:latin typeface="Calibri Light"/>
+              </a:defRPr>
+            </a:pPr>
+            <a:r>
+              <a:t>▸  Always begins with a plausible "what if" premise</a:t>
             </a:r>
           </a:p>
           <a:p>
             <a:pPr algn="l">
               <a:spcBef>
-                <a:spcPts val="1200"/>
+                <a:spcPts val="1800"/>
               </a:spcBef>
-              <a:defRPr sz="2000" b="0">
-                <a:solidFill>
-                  <a:srgbClr val="DCDCE6"/>
-                </a:solidFill>
-                <a:latin typeface="Calibri"/>
-              </a:defRPr>
-            </a:pPr>
-            <a:r>
-              <a:t>• Always starts with a plausible "what if" premise</a:t>
-            </a:r>
-          </a:p>
-          <a:p>
-            <a:pPr algn="l">
-              <a:spcBef>
-                <a:spcPts val="1200"/>
-              </a:spcBef>
-              <a:defRPr sz="2000" b="0">
-                <a:solidFill>
-                  <a:srgbClr val="DCDCE6"/>
-                </a:solidFill>
-                <a:latin typeface="Calibri"/>
-              </a:defRPr>
-            </a:pPr>
-            <a:r>
-              <a:t>• Uses that premise to examine something true about the real world</a:t>
+              <a:defRPr sz="2000" b="0" i="0">
+                <a:solidFill>
+                  <a:srgbClr val="D2D7E6"/>
+                </a:solidFill>
+                <a:latin typeface="Calibri Light"/>
+              </a:defRPr>
+            </a:pPr>
+            <a:r>
+              <a:t>▸  Uses that premise to examine something true about the real world</a:t>
             </a:r>
           </a:p>
         </p:txBody>
@@ -4415,6 +5482,9 @@
   <p:clrMapOvr>
     <a:masterClrMapping/>
   </p:clrMapOvr>
+  <p:transition xmlns:ns0="http://schemas.microsoft.com/office/powerpoint/2010/main" spd="med" ns0:dur="800">
+    <p:fade thruBlk="1"/>
+  </p:transition>
 </p:sld>
 </file>
 
@@ -4424,7 +5494,7 @@
     <p:bg>
       <p:bgPr>
         <a:solidFill>
-          <a:srgbClr val="141432"/>
+          <a:srgbClr val="101230"/>
         </a:solidFill>
         <a:effectLst/>
       </p:bgPr>
@@ -4438,14 +5508,148 @@
       <p:grpSpPr/>
       <p:sp>
         <p:nvSpPr>
-          <p:cNvPr id="2" name="TextBox 1"/>
+          <p:cNvPr id="2" name="Oval 1"/>
+          <p:cNvSpPr/>
+          <p:nvPr/>
+        </p:nvSpPr>
+        <p:spPr>
+          <a:xfrm>
+            <a:off x="0" y="1828800"/>
+            <a:ext cx="5486400" cy="5486400"/>
+          </a:xfrm>
+          <a:prstGeom prst="ellipse">
+            <a:avLst/>
+          </a:prstGeom>
+          <a:solidFill>
+            <a:srgbClr val="FFC33C">
+              <a:alpha val="5000"/>
+            </a:srgbClr>
+          </a:solidFill>
+          <a:ln>
+            <a:noFill/>
+          </a:ln>
+        </p:spPr>
+        <p:style>
+          <a:lnRef idx="1">
+            <a:schemeClr val="accent1"/>
+          </a:lnRef>
+          <a:fillRef idx="3">
+            <a:schemeClr val="accent1"/>
+          </a:fillRef>
+          <a:effectRef idx="2">
+            <a:schemeClr val="accent1"/>
+          </a:effectRef>
+          <a:fontRef idx="minor">
+            <a:schemeClr val="lt1"/>
+          </a:fontRef>
+        </p:style>
+        <p:txBody>
+          <a:bodyPr rtlCol="0" anchor="ctr"/>
+          <a:lstStyle/>
+          <a:p>
+            <a:pPr algn="ctr"/>
+          </a:p>
+        </p:txBody>
+      </p:sp>
+      <p:sp>
+        <p:nvSpPr>
+          <p:cNvPr id="3" name="Oval 2"/>
+          <p:cNvSpPr/>
+          <p:nvPr/>
+        </p:nvSpPr>
+        <p:spPr>
+          <a:xfrm>
+            <a:off x="7315200" y="457200"/>
+            <a:ext cx="5486400" cy="5486400"/>
+          </a:xfrm>
+          <a:prstGeom prst="ellipse">
+            <a:avLst/>
+          </a:prstGeom>
+          <a:solidFill>
+            <a:srgbClr val="5AAAFF">
+              <a:alpha val="5000"/>
+            </a:srgbClr>
+          </a:solidFill>
+          <a:ln>
+            <a:noFill/>
+          </a:ln>
+        </p:spPr>
+        <p:style>
+          <a:lnRef idx="1">
+            <a:schemeClr val="accent1"/>
+          </a:lnRef>
+          <a:fillRef idx="3">
+            <a:schemeClr val="accent1"/>
+          </a:fillRef>
+          <a:effectRef idx="2">
+            <a:schemeClr val="accent1"/>
+          </a:effectRef>
+          <a:fontRef idx="minor">
+            <a:schemeClr val="lt1"/>
+          </a:fontRef>
+        </p:style>
+        <p:txBody>
+          <a:bodyPr rtlCol="0" anchor="ctr"/>
+          <a:lstStyle/>
+          <a:p>
+            <a:pPr algn="ctr"/>
+          </a:p>
+        </p:txBody>
+      </p:sp>
+      <p:sp>
+        <p:nvSpPr>
+          <p:cNvPr id="4" name="Rectangle 3"/>
+          <p:cNvSpPr/>
+          <p:nvPr/>
+        </p:nvSpPr>
+        <p:spPr>
+          <a:xfrm>
+            <a:off x="3657600" y="2377440"/>
+            <a:ext cx="4846320" cy="25400"/>
+          </a:xfrm>
+          <a:prstGeom prst="rect">
+            <a:avLst/>
+          </a:prstGeom>
+          <a:solidFill>
+            <a:srgbClr val="FFC33C"/>
+          </a:solidFill>
+          <a:ln>
+            <a:noFill/>
+          </a:ln>
+          <a:effectLst/>
+        </p:spPr>
+        <p:style>
+          <a:lnRef idx="1">
+            <a:schemeClr val="accent1"/>
+          </a:lnRef>
+          <a:fillRef idx="3">
+            <a:schemeClr val="accent1"/>
+          </a:fillRef>
+          <a:effectRef idx="2">
+            <a:schemeClr val="accent1"/>
+          </a:effectRef>
+          <a:fontRef idx="minor">
+            <a:schemeClr val="lt1"/>
+          </a:fontRef>
+        </p:style>
+        <p:txBody>
+          <a:bodyPr rtlCol="0" anchor="ctr"/>
+          <a:lstStyle/>
+          <a:p>
+            <a:pPr algn="ctr"/>
+          </a:p>
+        </p:txBody>
+      </p:sp>
+      <p:sp>
+        <p:nvSpPr>
+          <p:cNvPr id="5" name="TextBox 4"/>
           <p:cNvSpPr txBox="1"/>
           <p:nvPr/>
         </p:nvSpPr>
         <p:spPr>
           <a:xfrm>
             <a:off x="914400" y="2560320"/>
-            <a:ext cx="10058400" cy="914400"/>
+            <a:ext cx="10332720" cy="1097280"/>
           </a:xfrm>
           <a:prstGeom prst="rect">
             <a:avLst/>
@@ -4459,29 +5663,29 @@
           <a:lstStyle/>
           <a:p>
             <a:pPr algn="ctr">
-              <a:defRPr sz="4000" b="1">
-                <a:solidFill>
-                  <a:srgbClr val="FFC850"/>
+              <a:defRPr sz="4600" b="1" i="0">
+                <a:solidFill>
+                  <a:srgbClr val="FFC33C"/>
                 </a:solidFill>
                 <a:latin typeface="Calibri"/>
               </a:defRPr>
             </a:pPr>
             <a:r>
-              <a:t>THREE HALLMARKS OF HARD SCI-FI</a:t>
-            </a:r>
-          </a:p>
-        </p:txBody>
-      </p:sp>
-      <p:sp>
-        <p:nvSpPr>
-          <p:cNvPr id="3" name="TextBox 2"/>
+              <a:t>THREE HALLMARKS</a:t>
+            </a:r>
+          </a:p>
+        </p:txBody>
+      </p:sp>
+      <p:sp>
+        <p:nvSpPr>
+          <p:cNvPr id="6" name="TextBox 5"/>
           <p:cNvSpPr txBox="1"/>
           <p:nvPr/>
         </p:nvSpPr>
         <p:spPr>
           <a:xfrm>
-            <a:off x="1371600" y="3840480"/>
-            <a:ext cx="9144000" cy="914400"/>
+            <a:off x="914400" y="3749039"/>
+            <a:ext cx="10332720" cy="640080"/>
           </a:xfrm>
           <a:prstGeom prst="rect">
             <a:avLst/>
@@ -4495,11 +5699,91 @@
           <a:lstStyle/>
           <a:p>
             <a:pPr algn="ctr">
-              <a:defRPr sz="2000" b="0">
-                <a:solidFill>
-                  <a:srgbClr val="AAAABE"/>
-                </a:solidFill>
-                <a:latin typeface="Calibri"/>
+              <a:defRPr sz="2200" b="0" i="0">
+                <a:solidFill>
+                  <a:srgbClr val="969BB4"/>
+                </a:solidFill>
+                <a:latin typeface="Calibri Light"/>
+              </a:defRPr>
+            </a:pPr>
+            <a:r>
+              <a:t>OF HARD SCIENCE FICTION</a:t>
+            </a:r>
+          </a:p>
+        </p:txBody>
+      </p:sp>
+      <p:sp>
+        <p:nvSpPr>
+          <p:cNvPr id="7" name="Rectangle 6"/>
+          <p:cNvSpPr/>
+          <p:nvPr/>
+        </p:nvSpPr>
+        <p:spPr>
+          <a:xfrm>
+            <a:off x="3657600" y="4572000"/>
+            <a:ext cx="4846320" cy="25400"/>
+          </a:xfrm>
+          <a:prstGeom prst="rect">
+            <a:avLst/>
+          </a:prstGeom>
+          <a:solidFill>
+            <a:srgbClr val="FFC33C"/>
+          </a:solidFill>
+          <a:ln>
+            <a:noFill/>
+          </a:ln>
+          <a:effectLst/>
+        </p:spPr>
+        <p:style>
+          <a:lnRef idx="1">
+            <a:schemeClr val="accent1"/>
+          </a:lnRef>
+          <a:fillRef idx="3">
+            <a:schemeClr val="accent1"/>
+          </a:fillRef>
+          <a:effectRef idx="2">
+            <a:schemeClr val="accent1"/>
+          </a:effectRef>
+          <a:fontRef idx="minor">
+            <a:schemeClr val="lt1"/>
+          </a:fontRef>
+        </p:style>
+        <p:txBody>
+          <a:bodyPr rtlCol="0" anchor="ctr"/>
+          <a:lstStyle/>
+          <a:p>
+            <a:pPr algn="ctr"/>
+          </a:p>
+        </p:txBody>
+      </p:sp>
+      <p:sp>
+        <p:nvSpPr>
+          <p:cNvPr id="8" name="TextBox 7"/>
+          <p:cNvSpPr txBox="1"/>
+          <p:nvPr/>
+        </p:nvSpPr>
+        <p:spPr>
+          <a:xfrm>
+            <a:off x="1371600" y="4846320"/>
+            <a:ext cx="9418320" cy="731520"/>
+          </a:xfrm>
+          <a:prstGeom prst="rect">
+            <a:avLst/>
+          </a:prstGeom>
+          <a:noFill/>
+        </p:spPr>
+        <p:txBody>
+          <a:bodyPr wrap="square">
+            <a:spAutoFit/>
+          </a:bodyPr>
+          <a:lstStyle/>
+          <a:p>
+            <a:pPr algn="ctr">
+              <a:defRPr sz="1600" b="0" i="1">
+                <a:solidFill>
+                  <a:srgbClr val="969BB4"/>
+                </a:solidFill>
+                <a:latin typeface="Calibri Light"/>
               </a:defRPr>
             </a:pPr>
             <a:r>
@@ -4513,6 +5797,9 @@
   <p:clrMapOvr>
     <a:masterClrMapping/>
   </p:clrMapOvr>
+  <p:transition xmlns:ns0="http://schemas.microsoft.com/office/powerpoint/2010/main" spd="med" ns0:dur="900">
+    <p:wipe dir="d"/>
+  </p:transition>
 </p:sld>
 </file>
 
@@ -4522,7 +5809,7 @@
     <p:bg>
       <p:bgPr>
         <a:solidFill>
-          <a:srgbClr val="0A0A1E"/>
+          <a:srgbClr val="08081C"/>
         </a:solidFill>
         <a:effectLst/>
       </p:bgPr>
@@ -4557,9 +5844,9 @@
           <a:lstStyle/>
           <a:p>
             <a:pPr algn="l">
-              <a:defRPr sz="3600" b="1">
-                <a:solidFill>
-                  <a:srgbClr val="64B4FF"/>
+              <a:defRPr sz="3400" b="1" i="0">
+                <a:solidFill>
+                  <a:srgbClr val="5AAAFF"/>
                 </a:solidFill>
                 <a:latin typeface="Calibri"/>
               </a:defRPr>
@@ -4572,26 +5859,25 @@
       </p:sp>
       <p:sp>
         <p:nvSpPr>
-          <p:cNvPr id="3" name="Rounded Rectangle 2"/>
+          <p:cNvPr id="3" name="Rectangle 2"/>
           <p:cNvSpPr/>
           <p:nvPr/>
         </p:nvSpPr>
         <p:spPr>
           <a:xfrm>
-            <a:off x="1097280" y="1828800"/>
-            <a:ext cx="9601200" cy="1188720"/>
-          </a:xfrm>
-          <a:prstGeom prst="roundRect">
+            <a:off x="731520" y="1188720"/>
+            <a:ext cx="3200400" cy="38100"/>
+          </a:xfrm>
+          <a:prstGeom prst="rect">
             <a:avLst/>
           </a:prstGeom>
           <a:solidFill>
-            <a:srgbClr val="1E1E46"/>
+            <a:srgbClr val="5AAAFF"/>
           </a:solidFill>
-          <a:ln w="19050">
-            <a:solidFill>
-              <a:srgbClr val="64B4FF"/>
-            </a:solidFill>
+          <a:ln>
+            <a:noFill/>
           </a:ln>
+          <a:effectLst/>
         </p:spPr>
         <p:style>
           <a:lnRef idx="1">
@@ -4611,17 +5897,7 @@
           <a:bodyPr rtlCol="0" anchor="ctr"/>
           <a:lstStyle/>
           <a:p>
-            <a:pPr algn="ctr">
-              <a:defRPr sz="2400" b="1">
-                <a:solidFill>
-                  <a:srgbClr val="FFFFFF"/>
-                </a:solidFill>
-                <a:latin typeface="Calibri"/>
-              </a:defRPr>
-            </a:pPr>
-            <a:r>
-              <a:t>  1.  Science as Plot Engine</a:t>
-            </a:r>
+            <a:pPr algn="ctr"/>
           </a:p>
         </p:txBody>
       </p:sp>
@@ -4633,18 +5909,18 @@
         </p:nvSpPr>
         <p:spPr>
           <a:xfrm>
-            <a:off x="1097280" y="3383280"/>
-            <a:ext cx="9601200" cy="1188720"/>
+            <a:off x="914400" y="1828800"/>
+            <a:ext cx="10332720" cy="1325880"/>
           </a:xfrm>
           <a:prstGeom prst="roundRect">
             <a:avLst/>
           </a:prstGeom>
           <a:solidFill>
-            <a:srgbClr val="1E1E46"/>
+            <a:srgbClr val="121637"/>
           </a:solidFill>
-          <a:ln w="19050">
+          <a:ln w="15240">
             <a:solidFill>
-              <a:srgbClr val="64B4FF"/>
+              <a:srgbClr val="5AAAFF"/>
             </a:solidFill>
           </a:ln>
         </p:spPr>
@@ -4666,40 +5942,138 @@
           <a:bodyPr rtlCol="0" anchor="ctr"/>
           <a:lstStyle/>
           <a:p>
+            <a:pPr algn="ctr"/>
+          </a:p>
+        </p:txBody>
+      </p:sp>
+      <p:sp>
+        <p:nvSpPr>
+          <p:cNvPr id="5" name="TextBox 4"/>
+          <p:cNvSpPr txBox="1"/>
+          <p:nvPr/>
+        </p:nvSpPr>
+        <p:spPr>
+          <a:xfrm>
+            <a:off x="1188720" y="1965960"/>
+            <a:ext cx="822960" cy="914400"/>
+          </a:xfrm>
+          <a:prstGeom prst="rect">
+            <a:avLst/>
+          </a:prstGeom>
+          <a:noFill/>
+        </p:spPr>
+        <p:txBody>
+          <a:bodyPr wrap="square">
+            <a:spAutoFit/>
+          </a:bodyPr>
+          <a:lstStyle/>
+          <a:p>
             <a:pPr algn="ctr">
-              <a:defRPr sz="2400" b="1">
-                <a:solidFill>
-                  <a:srgbClr val="FFFFFF"/>
+              <a:defRPr sz="3200" b="1" i="0">
+                <a:solidFill>
+                  <a:srgbClr val="FFC33C"/>
                 </a:solidFill>
                 <a:latin typeface="Calibri"/>
               </a:defRPr>
             </a:pPr>
             <a:r>
-              <a:t>  2.  The Isolated Protagonist as Social Mirror</a:t>
-            </a:r>
-          </a:p>
-        </p:txBody>
-      </p:sp>
-      <p:sp>
-        <p:nvSpPr>
-          <p:cNvPr id="5" name="Rounded Rectangle 4"/>
+              <a:t>01</a:t>
+            </a:r>
+          </a:p>
+        </p:txBody>
+      </p:sp>
+      <p:sp>
+        <p:nvSpPr>
+          <p:cNvPr id="6" name="TextBox 5"/>
+          <p:cNvSpPr txBox="1"/>
+          <p:nvPr/>
+        </p:nvSpPr>
+        <p:spPr>
+          <a:xfrm>
+            <a:off x="2194560" y="1965960"/>
+            <a:ext cx="8686800" cy="548640"/>
+          </a:xfrm>
+          <a:prstGeom prst="rect">
+            <a:avLst/>
+          </a:prstGeom>
+          <a:noFill/>
+        </p:spPr>
+        <p:txBody>
+          <a:bodyPr wrap="square">
+            <a:spAutoFit/>
+          </a:bodyPr>
+          <a:lstStyle/>
+          <a:p>
+            <a:pPr algn="l">
+              <a:defRPr sz="2200" b="1" i="0">
+                <a:solidFill>
+                  <a:srgbClr val="FAFAFF"/>
+                </a:solidFill>
+                <a:latin typeface="Calibri"/>
+              </a:defRPr>
+            </a:pPr>
+            <a:r>
+              <a:t>Science as Plot Engine</a:t>
+            </a:r>
+          </a:p>
+        </p:txBody>
+      </p:sp>
+      <p:sp>
+        <p:nvSpPr>
+          <p:cNvPr id="7" name="TextBox 6"/>
+          <p:cNvSpPr txBox="1"/>
+          <p:nvPr/>
+        </p:nvSpPr>
+        <p:spPr>
+          <a:xfrm>
+            <a:off x="2194560" y="2514600"/>
+            <a:ext cx="8686800" cy="548640"/>
+          </a:xfrm>
+          <a:prstGeom prst="rect">
+            <a:avLst/>
+          </a:prstGeom>
+          <a:noFill/>
+        </p:spPr>
+        <p:txBody>
+          <a:bodyPr wrap="square">
+            <a:spAutoFit/>
+          </a:bodyPr>
+          <a:lstStyle/>
+          <a:p>
+            <a:pPr algn="l">
+              <a:defRPr sz="1600" b="0" i="0">
+                <a:solidFill>
+                  <a:srgbClr val="969BB4"/>
+                </a:solidFill>
+                <a:latin typeface="Calibri Light"/>
+              </a:defRPr>
+            </a:pPr>
+            <a:r>
+              <a:t>The science drives every plot event — remove it and the story collapses</a:t>
+            </a:r>
+          </a:p>
+        </p:txBody>
+      </p:sp>
+      <p:sp>
+        <p:nvSpPr>
+          <p:cNvPr id="8" name="Rounded Rectangle 7"/>
           <p:cNvSpPr/>
           <p:nvPr/>
         </p:nvSpPr>
         <p:spPr>
           <a:xfrm>
-            <a:off x="1097280" y="4937760"/>
-            <a:ext cx="9601200" cy="1188720"/>
+            <a:off x="914400" y="3429000"/>
+            <a:ext cx="10332720" cy="1325880"/>
           </a:xfrm>
           <a:prstGeom prst="roundRect">
             <a:avLst/>
           </a:prstGeom>
           <a:solidFill>
-            <a:srgbClr val="1E1E46"/>
+            <a:srgbClr val="121637"/>
           </a:solidFill>
-          <a:ln w="19050">
+          <a:ln w="15240">
             <a:solidFill>
-              <a:srgbClr val="64B4FF"/>
+              <a:srgbClr val="5AAAFF"/>
             </a:solidFill>
           </a:ln>
         </p:spPr>
@@ -4721,16 +6095,267 @@
           <a:bodyPr rtlCol="0" anchor="ctr"/>
           <a:lstStyle/>
           <a:p>
+            <a:pPr algn="ctr"/>
+          </a:p>
+        </p:txBody>
+      </p:sp>
+      <p:sp>
+        <p:nvSpPr>
+          <p:cNvPr id="9" name="TextBox 8"/>
+          <p:cNvSpPr txBox="1"/>
+          <p:nvPr/>
+        </p:nvSpPr>
+        <p:spPr>
+          <a:xfrm>
+            <a:off x="1188720" y="3566160"/>
+            <a:ext cx="822960" cy="914400"/>
+          </a:xfrm>
+          <a:prstGeom prst="rect">
+            <a:avLst/>
+          </a:prstGeom>
+          <a:noFill/>
+        </p:spPr>
+        <p:txBody>
+          <a:bodyPr wrap="square">
+            <a:spAutoFit/>
+          </a:bodyPr>
+          <a:lstStyle/>
+          <a:p>
             <a:pPr algn="ctr">
-              <a:defRPr sz="2400" b="1">
-                <a:solidFill>
-                  <a:srgbClr val="FFFFFF"/>
+              <a:defRPr sz="3200" b="1" i="0">
+                <a:solidFill>
+                  <a:srgbClr val="FFC33C"/>
                 </a:solidFill>
                 <a:latin typeface="Calibri"/>
               </a:defRPr>
             </a:pPr>
             <a:r>
-              <a:t>  3.  The "What If" Premise as Social Critique</a:t>
+              <a:t>02</a:t>
+            </a:r>
+          </a:p>
+        </p:txBody>
+      </p:sp>
+      <p:sp>
+        <p:nvSpPr>
+          <p:cNvPr id="10" name="TextBox 9"/>
+          <p:cNvSpPr txBox="1"/>
+          <p:nvPr/>
+        </p:nvSpPr>
+        <p:spPr>
+          <a:xfrm>
+            <a:off x="2194560" y="3566160"/>
+            <a:ext cx="8686800" cy="548640"/>
+          </a:xfrm>
+          <a:prstGeom prst="rect">
+            <a:avLst/>
+          </a:prstGeom>
+          <a:noFill/>
+        </p:spPr>
+        <p:txBody>
+          <a:bodyPr wrap="square">
+            <a:spAutoFit/>
+          </a:bodyPr>
+          <a:lstStyle/>
+          <a:p>
+            <a:pPr algn="l">
+              <a:defRPr sz="2200" b="1" i="0">
+                <a:solidFill>
+                  <a:srgbClr val="FAFAFF"/>
+                </a:solidFill>
+                <a:latin typeface="Calibri"/>
+              </a:defRPr>
+            </a:pPr>
+            <a:r>
+              <a:t>Isolated Protagonist as Social Mirror</a:t>
+            </a:r>
+          </a:p>
+        </p:txBody>
+      </p:sp>
+      <p:sp>
+        <p:nvSpPr>
+          <p:cNvPr id="11" name="TextBox 10"/>
+          <p:cNvSpPr txBox="1"/>
+          <p:nvPr/>
+        </p:nvSpPr>
+        <p:spPr>
+          <a:xfrm>
+            <a:off x="2194560" y="4114800"/>
+            <a:ext cx="8686800" cy="548640"/>
+          </a:xfrm>
+          <a:prstGeom prst="rect">
+            <a:avLst/>
+          </a:prstGeom>
+          <a:noFill/>
+        </p:spPr>
+        <p:txBody>
+          <a:bodyPr wrap="square">
+            <a:spAutoFit/>
+          </a:bodyPr>
+          <a:lstStyle/>
+          <a:p>
+            <a:pPr algn="l">
+              <a:defRPr sz="1600" b="0" i="0">
+                <a:solidFill>
+                  <a:srgbClr val="969BB4"/>
+                </a:solidFill>
+                <a:latin typeface="Calibri Light"/>
+              </a:defRPr>
+            </a:pPr>
+            <a:r>
+              <a:t>Strips away civilization to ask what it was actually for</a:t>
+            </a:r>
+          </a:p>
+        </p:txBody>
+      </p:sp>
+      <p:sp>
+        <p:nvSpPr>
+          <p:cNvPr id="12" name="Rounded Rectangle 11"/>
+          <p:cNvSpPr/>
+          <p:nvPr/>
+        </p:nvSpPr>
+        <p:spPr>
+          <a:xfrm>
+            <a:off x="914400" y="5029200"/>
+            <a:ext cx="10332720" cy="1325880"/>
+          </a:xfrm>
+          <a:prstGeom prst="roundRect">
+            <a:avLst/>
+          </a:prstGeom>
+          <a:solidFill>
+            <a:srgbClr val="121637"/>
+          </a:solidFill>
+          <a:ln w="15240">
+            <a:solidFill>
+              <a:srgbClr val="5AAAFF"/>
+            </a:solidFill>
+          </a:ln>
+        </p:spPr>
+        <p:style>
+          <a:lnRef idx="1">
+            <a:schemeClr val="accent1"/>
+          </a:lnRef>
+          <a:fillRef idx="3">
+            <a:schemeClr val="accent1"/>
+          </a:fillRef>
+          <a:effectRef idx="2">
+            <a:schemeClr val="accent1"/>
+          </a:effectRef>
+          <a:fontRef idx="minor">
+            <a:schemeClr val="lt1"/>
+          </a:fontRef>
+        </p:style>
+        <p:txBody>
+          <a:bodyPr rtlCol="0" anchor="ctr"/>
+          <a:lstStyle/>
+          <a:p>
+            <a:pPr algn="ctr"/>
+          </a:p>
+        </p:txBody>
+      </p:sp>
+      <p:sp>
+        <p:nvSpPr>
+          <p:cNvPr id="13" name="TextBox 12"/>
+          <p:cNvSpPr txBox="1"/>
+          <p:nvPr/>
+        </p:nvSpPr>
+        <p:spPr>
+          <a:xfrm>
+            <a:off x="1188720" y="5166360"/>
+            <a:ext cx="822960" cy="914400"/>
+          </a:xfrm>
+          <a:prstGeom prst="rect">
+            <a:avLst/>
+          </a:prstGeom>
+          <a:noFill/>
+        </p:spPr>
+        <p:txBody>
+          <a:bodyPr wrap="square">
+            <a:spAutoFit/>
+          </a:bodyPr>
+          <a:lstStyle/>
+          <a:p>
+            <a:pPr algn="ctr">
+              <a:defRPr sz="3200" b="1" i="0">
+                <a:solidFill>
+                  <a:srgbClr val="FFC33C"/>
+                </a:solidFill>
+                <a:latin typeface="Calibri"/>
+              </a:defRPr>
+            </a:pPr>
+            <a:r>
+              <a:t>03</a:t>
+            </a:r>
+          </a:p>
+        </p:txBody>
+      </p:sp>
+      <p:sp>
+        <p:nvSpPr>
+          <p:cNvPr id="14" name="TextBox 13"/>
+          <p:cNvSpPr txBox="1"/>
+          <p:nvPr/>
+        </p:nvSpPr>
+        <p:spPr>
+          <a:xfrm>
+            <a:off x="2194560" y="5166360"/>
+            <a:ext cx="8686800" cy="548640"/>
+          </a:xfrm>
+          <a:prstGeom prst="rect">
+            <a:avLst/>
+          </a:prstGeom>
+          <a:noFill/>
+        </p:spPr>
+        <p:txBody>
+          <a:bodyPr wrap="square">
+            <a:spAutoFit/>
+          </a:bodyPr>
+          <a:lstStyle/>
+          <a:p>
+            <a:pPr algn="l">
+              <a:defRPr sz="2200" b="1" i="0">
+                <a:solidFill>
+                  <a:srgbClr val="FAFAFF"/>
+                </a:solidFill>
+                <a:latin typeface="Calibri"/>
+              </a:defRPr>
+            </a:pPr>
+            <a:r>
+              <a:t>"What If" Premise as Social Critique</a:t>
+            </a:r>
+          </a:p>
+        </p:txBody>
+      </p:sp>
+      <p:sp>
+        <p:nvSpPr>
+          <p:cNvPr id="15" name="TextBox 14"/>
+          <p:cNvSpPr txBox="1"/>
+          <p:nvPr/>
+        </p:nvSpPr>
+        <p:spPr>
+          <a:xfrm>
+            <a:off x="2194560" y="5715000"/>
+            <a:ext cx="8686800" cy="548640"/>
+          </a:xfrm>
+          <a:prstGeom prst="rect">
+            <a:avLst/>
+          </a:prstGeom>
+          <a:noFill/>
+        </p:spPr>
+        <p:txBody>
+          <a:bodyPr wrap="square">
+            <a:spAutoFit/>
+          </a:bodyPr>
+          <a:lstStyle/>
+          <a:p>
+            <a:pPr algn="l">
+              <a:defRPr sz="1600" b="0" i="0">
+                <a:solidFill>
+                  <a:srgbClr val="969BB4"/>
+                </a:solidFill>
+                <a:latin typeface="Calibri Light"/>
+              </a:defRPr>
+            </a:pPr>
+            <a:r>
+              <a:t>Uses a plausible premise to interrogate the present world</a:t>
             </a:r>
           </a:p>
         </p:txBody>
@@ -4740,6 +6365,9 @@
   <p:clrMapOvr>
     <a:masterClrMapping/>
   </p:clrMapOvr>
+  <p:transition xmlns:ns0="http://schemas.microsoft.com/office/powerpoint/2010/main" spd="med" ns0:dur="800">
+    <p:fade thruBlk="1"/>
+  </p:transition>
 </p:sld>
 </file>
 
@@ -4749,7 +6377,7 @@
     <p:bg>
       <p:bgPr>
         <a:solidFill>
-          <a:srgbClr val="0A0A1E"/>
+          <a:srgbClr val="08081C"/>
         </a:solidFill>
         <a:effectLst/>
       </p:bgPr>
@@ -4763,14 +6391,59 @@
       <p:grpSpPr/>
       <p:sp>
         <p:nvSpPr>
-          <p:cNvPr id="2" name="TextBox 1"/>
+          <p:cNvPr id="2" name="Oval 1"/>
+          <p:cNvSpPr/>
+          <p:nvPr/>
+        </p:nvSpPr>
+        <p:spPr>
+          <a:xfrm>
+            <a:off x="10058400" y="-914400"/>
+            <a:ext cx="3200400" cy="3200400"/>
+          </a:xfrm>
+          <a:prstGeom prst="ellipse">
+            <a:avLst/>
+          </a:prstGeom>
+          <a:solidFill>
+            <a:srgbClr val="5AAAFF">
+              <a:alpha val="7000"/>
+            </a:srgbClr>
+          </a:solidFill>
+          <a:ln>
+            <a:noFill/>
+          </a:ln>
+        </p:spPr>
+        <p:style>
+          <a:lnRef idx="1">
+            <a:schemeClr val="accent1"/>
+          </a:lnRef>
+          <a:fillRef idx="3">
+            <a:schemeClr val="accent1"/>
+          </a:fillRef>
+          <a:effectRef idx="2">
+            <a:schemeClr val="accent1"/>
+          </a:effectRef>
+          <a:fontRef idx="minor">
+            <a:schemeClr val="lt1"/>
+          </a:fontRef>
+        </p:style>
+        <p:txBody>
+          <a:bodyPr rtlCol="0" anchor="ctr"/>
+          <a:lstStyle/>
+          <a:p>
+            <a:pPr algn="ctr"/>
+          </a:p>
+        </p:txBody>
+      </p:sp>
+      <p:sp>
+        <p:nvSpPr>
+          <p:cNvPr id="3" name="TextBox 2"/>
           <p:cNvSpPr txBox="1"/>
           <p:nvPr/>
         </p:nvSpPr>
         <p:spPr>
           <a:xfrm>
             <a:off x="731520" y="365760"/>
-            <a:ext cx="10058400" cy="822960"/>
+            <a:ext cx="8229600" cy="731520"/>
           </a:xfrm>
           <a:prstGeom prst="rect">
             <a:avLst/>
@@ -4784,9 +6457,9 @@
           <a:lstStyle/>
           <a:p>
             <a:pPr algn="l">
-              <a:defRPr sz="3200" b="1">
-                <a:solidFill>
-                  <a:srgbClr val="64B4FF"/>
+              <a:defRPr sz="3000" b="1" i="0">
+                <a:solidFill>
+                  <a:srgbClr val="5AAAFF"/>
                 </a:solidFill>
                 <a:latin typeface="Calibri"/>
               </a:defRPr>
@@ -4799,14 +6472,58 @@
       </p:sp>
       <p:sp>
         <p:nvSpPr>
-          <p:cNvPr id="3" name="TextBox 2"/>
+          <p:cNvPr id="4" name="Rectangle 3"/>
+          <p:cNvSpPr/>
+          <p:nvPr/>
+        </p:nvSpPr>
+        <p:spPr>
+          <a:xfrm>
+            <a:off x="731520" y="1051560"/>
+            <a:ext cx="5486400" cy="25400"/>
+          </a:xfrm>
+          <a:prstGeom prst="rect">
+            <a:avLst/>
+          </a:prstGeom>
+          <a:solidFill>
+            <a:srgbClr val="5AAAFF"/>
+          </a:solidFill>
+          <a:ln>
+            <a:noFill/>
+          </a:ln>
+          <a:effectLst/>
+        </p:spPr>
+        <p:style>
+          <a:lnRef idx="1">
+            <a:schemeClr val="accent1"/>
+          </a:lnRef>
+          <a:fillRef idx="3">
+            <a:schemeClr val="accent1"/>
+          </a:fillRef>
+          <a:effectRef idx="2">
+            <a:schemeClr val="accent1"/>
+          </a:effectRef>
+          <a:fontRef idx="minor">
+            <a:schemeClr val="lt1"/>
+          </a:fontRef>
+        </p:style>
+        <p:txBody>
+          <a:bodyPr rtlCol="0" anchor="ctr"/>
+          <a:lstStyle/>
+          <a:p>
+            <a:pPr algn="ctr"/>
+          </a:p>
+        </p:txBody>
+      </p:sp>
+      <p:sp>
+        <p:nvSpPr>
+          <p:cNvPr id="5" name="TextBox 4"/>
           <p:cNvSpPr txBox="1"/>
           <p:nvPr/>
         </p:nvSpPr>
         <p:spPr>
           <a:xfrm>
             <a:off x="731520" y="1371600"/>
-            <a:ext cx="10515600" cy="5029200"/>
+            <a:ext cx="4572000" cy="457200"/>
           </a:xfrm>
           <a:prstGeom prst="rect">
             <a:avLst/>
@@ -4820,156 +6537,346 @@
           <a:lstStyle/>
           <a:p>
             <a:pPr algn="l">
-              <a:defRPr sz="2200" b="1">
-                <a:solidFill>
-                  <a:srgbClr val="FFC850"/>
+              <a:defRPr sz="1600" b="1" i="0">
+                <a:solidFill>
+                  <a:srgbClr val="FFC33C"/>
                 </a:solidFill>
                 <a:latin typeface="Calibri"/>
               </a:defRPr>
             </a:pPr>
             <a:r>
-              <a:t>Interstellar</a:t>
-            </a:r>
+              <a:t>INTERSTELLAR</a:t>
+            </a:r>
+          </a:p>
+        </p:txBody>
+      </p:sp>
+      <p:sp>
+        <p:nvSpPr>
+          <p:cNvPr id="6" name="TextBox 5"/>
+          <p:cNvSpPr txBox="1"/>
+          <p:nvPr/>
+        </p:nvSpPr>
+        <p:spPr>
+          <a:xfrm>
+            <a:off x="731520" y="1828800"/>
+            <a:ext cx="6858000" cy="4114800"/>
+          </a:xfrm>
+          <a:prstGeom prst="rect">
+            <a:avLst/>
+          </a:prstGeom>
+          <a:noFill/>
+        </p:spPr>
+        <p:txBody>
+          <a:bodyPr wrap="square">
+            <a:spAutoFit/>
+          </a:bodyPr>
+          <a:lstStyle/>
+          <a:p>
+            <a:pPr algn="l">
+              <a:defRPr sz="1200" b="0" i="0">
+                <a:solidFill>
+                  <a:srgbClr val="FFFFFF"/>
+                </a:solidFill>
+                <a:latin typeface="Calibri Light"/>
+              </a:defRPr>
+            </a:pPr>
           </a:p>
           <a:p>
             <a:pPr algn="l">
               <a:spcBef>
-                <a:spcPts val="1200"/>
+                <a:spcPts val="800"/>
               </a:spcBef>
-              <a:defRPr sz="1800" b="0">
-                <a:solidFill>
-                  <a:srgbClr val="DCDCE6"/>
-                </a:solidFill>
-                <a:latin typeface="Calibri"/>
-              </a:defRPr>
-            </a:pPr>
-            <a:r>
-              <a:t>• Time dilation near Gargantua is applied special relativity</a:t>
+              <a:defRPr sz="1700" b="0" i="0">
+                <a:solidFill>
+                  <a:srgbClr val="D2D7E6"/>
+                </a:solidFill>
+                <a:latin typeface="Calibri Light"/>
+              </a:defRPr>
+            </a:pPr>
+            <a:r>
+              <a:t>▸  Time dilation near Gargantua = applied general relativity</a:t>
             </a:r>
           </a:p>
           <a:p>
             <a:pPr algn="l">
               <a:spcBef>
-                <a:spcPts val="1200"/>
+                <a:spcPts val="800"/>
               </a:spcBef>
-              <a:defRPr sz="1800" b="0">
-                <a:solidFill>
-                  <a:srgbClr val="DCDCE6"/>
-                </a:solidFill>
-                <a:latin typeface="Calibri"/>
-              </a:defRPr>
-            </a:pPr>
-            <a:r>
-              <a:t>• 1 hour on Miller's Planet = 7 years on Earth</a:t>
+              <a:defRPr sz="1700" b="0" i="0">
+                <a:solidFill>
+                  <a:srgbClr val="D2D7E6"/>
+                </a:solidFill>
+                <a:latin typeface="Calibri Light"/>
+              </a:defRPr>
+            </a:pPr>
+            <a:r>
+              <a:t>▸  1 hour on Miller's Planet = 7 years on Earth</a:t>
             </a:r>
           </a:p>
           <a:p>
             <a:pPr algn="l">
               <a:spcBef>
-                <a:spcPts val="1200"/>
+                <a:spcPts val="800"/>
               </a:spcBef>
-              <a:defRPr sz="1800" b="0">
-                <a:solidFill>
-                  <a:srgbClr val="DCDCE6"/>
-                </a:solidFill>
-                <a:latin typeface="Calibri"/>
-              </a:defRPr>
-            </a:pPr>
-            <a:r>
-              <a:t>• Cooper doesn't choose to lose his daughter — the physics does it for him</a:t>
+              <a:defRPr sz="1700" b="0" i="0">
+                <a:solidFill>
+                  <a:srgbClr val="D2D7E6"/>
+                </a:solidFill>
+                <a:latin typeface="Calibri Light"/>
+              </a:defRPr>
+            </a:pPr>
+            <a:r>
+              <a:t>▸  Cooper doesn't choose to lose his daughter — the physics does</a:t>
             </a:r>
           </a:p>
           <a:p>
             <a:pPr algn="l">
               <a:spcBef>
-                <a:spcPts val="1200"/>
+                <a:spcPts val="800"/>
               </a:spcBef>
-              <a:defRPr sz="1800" b="0">
-                <a:solidFill>
-                  <a:srgbClr val="DCDCE6"/>
-                </a:solidFill>
-                <a:latin typeface="Calibri"/>
-              </a:defRPr>
-            </a:pPr>
-            <a:r>
-              <a:t>• Kip Thorne (Nobel laureate) served as scientific advisor</a:t>
+              <a:defRPr sz="1700" b="0" i="0">
+                <a:solidFill>
+                  <a:srgbClr val="D2D7E6"/>
+                </a:solidFill>
+                <a:latin typeface="Calibri Light"/>
+              </a:defRPr>
+            </a:pPr>
+            <a:r>
+              <a:t>▸  Kip Thorne (Nobel laureate) as scientific advisor</a:t>
             </a:r>
           </a:p>
           <a:p>
             <a:pPr algn="l">
               <a:spcBef>
-                <a:spcPts val="1200"/>
+                <a:spcPts val="800"/>
               </a:spcBef>
-              <a:defRPr sz="1800" b="0">
-                <a:solidFill>
-                  <a:srgbClr val="DCDCE6"/>
+              <a:defRPr sz="1700" b="0" i="0">
+                <a:solidFill>
+                  <a:srgbClr val="D2D7E6"/>
+                </a:solidFill>
+                <a:latin typeface="Calibri Light"/>
+              </a:defRPr>
+            </a:pPr>
+            <a:r>
+              <a:t>▸  First scientifically accurate black hole simulation in film</a:t>
+            </a:r>
+          </a:p>
+        </p:txBody>
+      </p:sp>
+      <p:sp>
+        <p:nvSpPr>
+          <p:cNvPr id="7" name="Rounded Rectangle 6"/>
+          <p:cNvSpPr/>
+          <p:nvPr/>
+        </p:nvSpPr>
+        <p:spPr>
+          <a:xfrm>
+            <a:off x="7863840" y="1371600"/>
+            <a:ext cx="3931920" cy="3474720"/>
+          </a:xfrm>
+          <a:prstGeom prst="roundRect">
+            <a:avLst/>
+          </a:prstGeom>
+          <a:solidFill>
+            <a:srgbClr val="141932"/>
+          </a:solidFill>
+          <a:ln w="15240">
+            <a:solidFill>
+              <a:srgbClr val="FFC33C"/>
+            </a:solidFill>
+          </a:ln>
+        </p:spPr>
+        <p:style>
+          <a:lnRef idx="1">
+            <a:schemeClr val="accent1"/>
+          </a:lnRef>
+          <a:fillRef idx="3">
+            <a:schemeClr val="accent1"/>
+          </a:fillRef>
+          <a:effectRef idx="2">
+            <a:schemeClr val="accent1"/>
+          </a:effectRef>
+          <a:fontRef idx="minor">
+            <a:schemeClr val="lt1"/>
+          </a:fontRef>
+        </p:style>
+        <p:txBody>
+          <a:bodyPr rtlCol="0" anchor="ctr"/>
+          <a:lstStyle/>
+          <a:p>
+            <a:pPr algn="ctr"/>
+          </a:p>
+        </p:txBody>
+      </p:sp>
+      <p:sp>
+        <p:nvSpPr>
+          <p:cNvPr id="8" name="TextBox 7"/>
+          <p:cNvSpPr txBox="1"/>
+          <p:nvPr/>
+        </p:nvSpPr>
+        <p:spPr>
+          <a:xfrm>
+            <a:off x="8229600" y="1645920"/>
+            <a:ext cx="3291840" cy="457200"/>
+          </a:xfrm>
+          <a:prstGeom prst="rect">
+            <a:avLst/>
+          </a:prstGeom>
+          <a:noFill/>
+        </p:spPr>
+        <p:txBody>
+          <a:bodyPr wrap="square">
+            <a:spAutoFit/>
+          </a:bodyPr>
+          <a:lstStyle/>
+          <a:p>
+            <a:pPr algn="ctr">
+              <a:defRPr sz="1200" b="1" i="0">
+                <a:solidFill>
+                  <a:srgbClr val="969BB4"/>
                 </a:solidFill>
                 <a:latin typeface="Calibri"/>
               </a:defRPr>
             </a:pPr>
             <a:r>
-              <a:t>• Gargantua: first scientifically accurate black hole simulation in film</a:t>
-            </a:r>
+              <a:t>GENRE PARALLEL</a:t>
+            </a:r>
+          </a:p>
+        </p:txBody>
+      </p:sp>
+      <p:sp>
+        <p:nvSpPr>
+          <p:cNvPr id="9" name="TextBox 8"/>
+          <p:cNvSpPr txBox="1"/>
+          <p:nvPr/>
+        </p:nvSpPr>
+        <p:spPr>
+          <a:xfrm>
+            <a:off x="8229600" y="2103120"/>
+            <a:ext cx="3291840" cy="457200"/>
+          </a:xfrm>
+          <a:prstGeom prst="rect">
+            <a:avLst/>
+          </a:prstGeom>
+          <a:noFill/>
+        </p:spPr>
+        <p:txBody>
+          <a:bodyPr wrap="square">
+            <a:spAutoFit/>
+          </a:bodyPr>
+          <a:lstStyle/>
+          <a:p>
+            <a:pPr algn="ctr">
+              <a:defRPr sz="2000" b="1" i="0">
+                <a:solidFill>
+                  <a:srgbClr val="FFC33C"/>
+                </a:solidFill>
+                <a:latin typeface="Calibri Light"/>
+              </a:defRPr>
+            </a:pPr>
+            <a:r>
+              <a:t>The Martian</a:t>
+            </a:r>
+          </a:p>
+        </p:txBody>
+      </p:sp>
+      <p:sp>
+        <p:nvSpPr>
+          <p:cNvPr id="10" name="TextBox 9"/>
+          <p:cNvSpPr txBox="1"/>
+          <p:nvPr/>
+        </p:nvSpPr>
+        <p:spPr>
+          <a:xfrm>
+            <a:off x="8229600" y="2651760"/>
+            <a:ext cx="3291840" cy="365760"/>
+          </a:xfrm>
+          <a:prstGeom prst="rect">
+            <a:avLst/>
+          </a:prstGeom>
+          <a:noFill/>
+        </p:spPr>
+        <p:txBody>
+          <a:bodyPr wrap="square">
+            <a:spAutoFit/>
+          </a:bodyPr>
+          <a:lstStyle/>
+          <a:p>
+            <a:pPr algn="ctr">
+              <a:defRPr sz="1400" b="0" i="1">
+                <a:solidFill>
+                  <a:srgbClr val="969BB4"/>
+                </a:solidFill>
+                <a:latin typeface="Calibri Light"/>
+              </a:defRPr>
+            </a:pPr>
+            <a:r>
+              <a:t>Andy Weir</a:t>
+            </a:r>
+          </a:p>
+        </p:txBody>
+      </p:sp>
+      <p:sp>
+        <p:nvSpPr>
+          <p:cNvPr id="11" name="TextBox 10"/>
+          <p:cNvSpPr txBox="1"/>
+          <p:nvPr/>
+        </p:nvSpPr>
+        <p:spPr>
+          <a:xfrm>
+            <a:off x="8229600" y="3200400"/>
+            <a:ext cx="3474720" cy="1371600"/>
+          </a:xfrm>
+          <a:prstGeom prst="rect">
+            <a:avLst/>
+          </a:prstGeom>
+          <a:noFill/>
+        </p:spPr>
+        <p:txBody>
+          <a:bodyPr wrap="square">
+            <a:spAutoFit/>
+          </a:bodyPr>
+          <a:lstStyle/>
+          <a:p>
+            <a:pPr algn="l">
+              <a:defRPr sz="1200" b="0" i="0">
+                <a:solidFill>
+                  <a:srgbClr val="FFFFFF"/>
+                </a:solidFill>
+                <a:latin typeface="Calibri Light"/>
+              </a:defRPr>
+            </a:pPr>
           </a:p>
           <a:p>
             <a:pPr algn="l">
               <a:spcBef>
-                <a:spcPts val="1200"/>
+                <a:spcPts val="600"/>
               </a:spcBef>
-              <a:defRPr sz="1000" b="0">
-                <a:solidFill>
-                  <a:srgbClr val="FFFFFF"/>
-                </a:solidFill>
-                <a:latin typeface="Calibri"/>
-              </a:defRPr>
-            </a:pPr>
+              <a:defRPr sz="1500" b="0" i="0">
+                <a:solidFill>
+                  <a:srgbClr val="D2D7E6"/>
+                </a:solidFill>
+                <a:latin typeface="Calibri Light"/>
+              </a:defRPr>
+            </a:pPr>
+            <a:r>
+              <a:t>Watney survives using real chemistry (hydrazine → water)</a:t>
+            </a:r>
           </a:p>
           <a:p>
             <a:pPr algn="l">
               <a:spcBef>
-                <a:spcPts val="1200"/>
+                <a:spcPts val="1000"/>
               </a:spcBef>
-              <a:defRPr sz="2200" b="1">
-                <a:solidFill>
-                  <a:srgbClr val="FFC850"/>
-                </a:solidFill>
-                <a:latin typeface="Calibri"/>
-              </a:defRPr>
-            </a:pPr>
-            <a:r>
-              <a:t>Genre Parallel: The Martian (Andy Weir)</a:t>
-            </a:r>
-          </a:p>
-          <a:p>
-            <a:pPr algn="l">
-              <a:spcBef>
-                <a:spcPts val="1200"/>
-              </a:spcBef>
-              <a:defRPr sz="1800" b="0">
-                <a:solidFill>
-                  <a:srgbClr val="DCDCE6"/>
-                </a:solidFill>
-                <a:latin typeface="Calibri"/>
-              </a:defRPr>
-            </a:pPr>
-            <a:r>
-              <a:t>• Mark Watney survives using real chemistry (hydrazine → water)</a:t>
-            </a:r>
-          </a:p>
-          <a:p>
-            <a:pPr algn="l">
-              <a:spcBef>
-                <a:spcPts val="1200"/>
-              </a:spcBef>
-              <a:defRPr sz="1800" b="0">
-                <a:solidFill>
-                  <a:srgbClr val="DCDCE6"/>
-                </a:solidFill>
-                <a:latin typeface="Calibri"/>
-              </a:defRPr>
-            </a:pPr>
-            <a:r>
-              <a:t>• The plot stops the second the science stops</a:t>
+              <a:defRPr sz="1500" b="0" i="0">
+                <a:solidFill>
+                  <a:srgbClr val="D2D7E6"/>
+                </a:solidFill>
+                <a:latin typeface="Calibri Light"/>
+              </a:defRPr>
+            </a:pPr>
+            <a:r>
+              <a:t>The plot stops the second the science stops</a:t>
             </a:r>
           </a:p>
         </p:txBody>
@@ -4979,6 +6886,9 @@
   <p:clrMapOvr>
     <a:masterClrMapping/>
   </p:clrMapOvr>
+  <p:transition xmlns:ns0="http://schemas.microsoft.com/office/powerpoint/2010/main" spd="med" ns0:dur="800">
+    <p:push dir="l"/>
+  </p:transition>
 </p:sld>
 </file>
 
@@ -4988,7 +6898,7 @@
     <p:bg>
       <p:bgPr>
         <a:solidFill>
-          <a:srgbClr val="0A0A1E"/>
+          <a:srgbClr val="08081C"/>
         </a:solidFill>
         <a:effectLst/>
       </p:bgPr>
@@ -5002,14 +6912,59 @@
       <p:grpSpPr/>
       <p:sp>
         <p:nvSpPr>
-          <p:cNvPr id="2" name="TextBox 1"/>
+          <p:cNvPr id="2" name="Oval 1"/>
+          <p:cNvSpPr/>
+          <p:nvPr/>
+        </p:nvSpPr>
+        <p:spPr>
+          <a:xfrm>
+            <a:off x="-1371600" y="3657600"/>
+            <a:ext cx="3657600" cy="3657600"/>
+          </a:xfrm>
+          <a:prstGeom prst="ellipse">
+            <a:avLst/>
+          </a:prstGeom>
+          <a:solidFill>
+            <a:srgbClr val="50DCE6">
+              <a:alpha val="6000"/>
+            </a:srgbClr>
+          </a:solidFill>
+          <a:ln>
+            <a:noFill/>
+          </a:ln>
+        </p:spPr>
+        <p:style>
+          <a:lnRef idx="1">
+            <a:schemeClr val="accent1"/>
+          </a:lnRef>
+          <a:fillRef idx="3">
+            <a:schemeClr val="accent1"/>
+          </a:fillRef>
+          <a:effectRef idx="2">
+            <a:schemeClr val="accent1"/>
+          </a:effectRef>
+          <a:fontRef idx="minor">
+            <a:schemeClr val="lt1"/>
+          </a:fontRef>
+        </p:style>
+        <p:txBody>
+          <a:bodyPr rtlCol="0" anchor="ctr"/>
+          <a:lstStyle/>
+          <a:p>
+            <a:pPr algn="ctr"/>
+          </a:p>
+        </p:txBody>
+      </p:sp>
+      <p:sp>
+        <p:nvSpPr>
+          <p:cNvPr id="3" name="TextBox 2"/>
           <p:cNvSpPr txBox="1"/>
           <p:nvPr/>
         </p:nvSpPr>
         <p:spPr>
           <a:xfrm>
             <a:off x="731520" y="365760"/>
-            <a:ext cx="10058400" cy="822960"/>
+            <a:ext cx="8229600" cy="731520"/>
           </a:xfrm>
           <a:prstGeom prst="rect">
             <a:avLst/>
@@ -5023,9 +6978,9 @@
           <a:lstStyle/>
           <a:p>
             <a:pPr algn="l">
-              <a:defRPr sz="3200" b="1">
-                <a:solidFill>
-                  <a:srgbClr val="64B4FF"/>
+              <a:defRPr sz="3000" b="1" i="0">
+                <a:solidFill>
+                  <a:srgbClr val="5AAAFF"/>
                 </a:solidFill>
                 <a:latin typeface="Calibri"/>
               </a:defRPr>
@@ -5038,14 +6993,58 @@
       </p:sp>
       <p:sp>
         <p:nvSpPr>
-          <p:cNvPr id="3" name="TextBox 2"/>
+          <p:cNvPr id="4" name="Rectangle 3"/>
+          <p:cNvSpPr/>
+          <p:nvPr/>
+        </p:nvSpPr>
+        <p:spPr>
+          <a:xfrm>
+            <a:off x="731520" y="1051560"/>
+            <a:ext cx="5486400" cy="25400"/>
+          </a:xfrm>
+          <a:prstGeom prst="rect">
+            <a:avLst/>
+          </a:prstGeom>
+          <a:solidFill>
+            <a:srgbClr val="5AAAFF"/>
+          </a:solidFill>
+          <a:ln>
+            <a:noFill/>
+          </a:ln>
+          <a:effectLst/>
+        </p:spPr>
+        <p:style>
+          <a:lnRef idx="1">
+            <a:schemeClr val="accent1"/>
+          </a:lnRef>
+          <a:fillRef idx="3">
+            <a:schemeClr val="accent1"/>
+          </a:fillRef>
+          <a:effectRef idx="2">
+            <a:schemeClr val="accent1"/>
+          </a:effectRef>
+          <a:fontRef idx="minor">
+            <a:schemeClr val="lt1"/>
+          </a:fontRef>
+        </p:style>
+        <p:txBody>
+          <a:bodyPr rtlCol="0" anchor="ctr"/>
+          <a:lstStyle/>
+          <a:p>
+            <a:pPr algn="ctr"/>
+          </a:p>
+        </p:txBody>
+      </p:sp>
+      <p:sp>
+        <p:nvSpPr>
+          <p:cNvPr id="5" name="TextBox 4"/>
           <p:cNvSpPr txBox="1"/>
           <p:nvPr/>
         </p:nvSpPr>
         <p:spPr>
           <a:xfrm>
             <a:off x="731520" y="1371600"/>
-            <a:ext cx="10515600" cy="5029200"/>
+            <a:ext cx="4572000" cy="457200"/>
           </a:xfrm>
           <a:prstGeom prst="rect">
             <a:avLst/>
@@ -5059,124 +7058,323 @@
           <a:lstStyle/>
           <a:p>
             <a:pPr algn="l">
-              <a:defRPr sz="2200" b="1">
-                <a:solidFill>
-                  <a:srgbClr val="FFC850"/>
+              <a:defRPr sz="1600" b="1" i="0">
+                <a:solidFill>
+                  <a:srgbClr val="FFC33C"/>
                 </a:solidFill>
                 <a:latin typeface="Calibri"/>
               </a:defRPr>
             </a:pPr>
             <a:r>
-              <a:t>Interstellar</a:t>
-            </a:r>
+              <a:t>INTERSTELLAR</a:t>
+            </a:r>
+          </a:p>
+        </p:txBody>
+      </p:sp>
+      <p:sp>
+        <p:nvSpPr>
+          <p:cNvPr id="6" name="TextBox 5"/>
+          <p:cNvSpPr txBox="1"/>
+          <p:nvPr/>
+        </p:nvSpPr>
+        <p:spPr>
+          <a:xfrm>
+            <a:off x="731520" y="1828800"/>
+            <a:ext cx="6858000" cy="4114800"/>
+          </a:xfrm>
+          <a:prstGeom prst="rect">
+            <a:avLst/>
+          </a:prstGeom>
+          <a:noFill/>
+        </p:spPr>
+        <p:txBody>
+          <a:bodyPr wrap="square">
+            <a:spAutoFit/>
+          </a:bodyPr>
+          <a:lstStyle/>
+          <a:p>
+            <a:pPr algn="l">
+              <a:defRPr sz="1200" b="0" i="0">
+                <a:solidFill>
+                  <a:srgbClr val="FFFFFF"/>
+                </a:solidFill>
+                <a:latin typeface="Calibri Light"/>
+              </a:defRPr>
+            </a:pPr>
           </a:p>
           <a:p>
             <a:pPr algn="l">
               <a:spcBef>
-                <a:spcPts val="1200"/>
+                <a:spcPts val="800"/>
               </a:spcBef>
-              <a:defRPr sz="1800" b="0">
-                <a:solidFill>
-                  <a:srgbClr val="DCDCE6"/>
-                </a:solidFill>
-                <a:latin typeface="Calibri"/>
-              </a:defRPr>
-            </a:pPr>
-            <a:r>
-              <a:t>• Cooper is separated from his family for decades by the physics of space</a:t>
+              <a:defRPr sz="1700" b="0" i="0">
+                <a:solidFill>
+                  <a:srgbClr val="D2D7E6"/>
+                </a:solidFill>
+                <a:latin typeface="Calibri Light"/>
+              </a:defRPr>
+            </a:pPr>
+            <a:r>
+              <a:t>▸  Cooper separated from his family for decades by physics itself</a:t>
             </a:r>
           </a:p>
           <a:p>
             <a:pPr algn="l">
               <a:spcBef>
-                <a:spcPts val="1200"/>
+                <a:spcPts val="800"/>
               </a:spcBef>
-              <a:defRPr sz="1800" b="0">
-                <a:solidFill>
-                  <a:srgbClr val="DCDCE6"/>
-                </a:solidFill>
-                <a:latin typeface="Calibri"/>
-              </a:defRPr>
-            </a:pPr>
-            <a:r>
-              <a:t>• Strips away every support system civilization provides</a:t>
+              <a:defRPr sz="1700" b="0" i="0">
+                <a:solidFill>
+                  <a:srgbClr val="D2D7E6"/>
+                </a:solidFill>
+                <a:latin typeface="Calibri Light"/>
+              </a:defRPr>
+            </a:pPr>
+            <a:r>
+              <a:t>▸  Strips away every support system civilization provides</a:t>
             </a:r>
           </a:p>
           <a:p>
             <a:pPr algn="l">
               <a:spcBef>
-                <a:spcPts val="1200"/>
+                <a:spcPts val="800"/>
               </a:spcBef>
-              <a:defRPr sz="1800" b="0">
-                <a:solidFill>
-                  <a:srgbClr val="DCDCE6"/>
-                </a:solidFill>
-                <a:latin typeface="Calibri"/>
-              </a:defRPr>
-            </a:pPr>
-            <a:r>
-              <a:t>• Central question: What does a parent owe a child when humanity is at stake?</a:t>
+              <a:defRPr sz="1700" b="0" i="0">
+                <a:solidFill>
+                  <a:srgbClr val="D2D7E6"/>
+                </a:solidFill>
+                <a:latin typeface="Calibri Light"/>
+              </a:defRPr>
+            </a:pPr>
+            <a:r>
+              <a:t>▸  Then asks: what was that civilization actually for?</a:t>
             </a:r>
           </a:p>
           <a:p>
             <a:pPr algn="l">
               <a:spcBef>
-                <a:spcPts val="1200"/>
+                <a:spcPts val="1000"/>
               </a:spcBef>
-              <a:defRPr sz="1000" b="0">
+              <a:defRPr sz="800" b="0" i="0">
                 <a:solidFill>
                   <a:srgbClr val="FFFFFF"/>
                 </a:solidFill>
-                <a:latin typeface="Calibri"/>
+                <a:latin typeface="Calibri Light"/>
               </a:defRPr>
             </a:pPr>
           </a:p>
           <a:p>
             <a:pPr algn="l">
               <a:spcBef>
-                <a:spcPts val="1200"/>
+                <a:spcPts val="1400"/>
               </a:spcBef>
-              <a:defRPr sz="2200" b="1">
-                <a:solidFill>
-                  <a:srgbClr val="FFC850"/>
-                </a:solidFill>
-                <a:latin typeface="Calibri"/>
-              </a:defRPr>
-            </a:pPr>
-            <a:r>
-              <a:t>Genre Parallel: Contact (1997)</a:t>
+              <a:defRPr sz="1700" b="1" i="0">
+                <a:solidFill>
+                  <a:srgbClr val="50DCE6"/>
+                </a:solidFill>
+                <a:latin typeface="Calibri Light"/>
+              </a:defRPr>
+            </a:pPr>
+            <a:r>
+              <a:t>Central question:</a:t>
             </a:r>
           </a:p>
           <a:p>
             <a:pPr algn="l">
               <a:spcBef>
-                <a:spcPts val="1200"/>
+                <a:spcPts val="600"/>
               </a:spcBef>
-              <a:defRPr sz="1800" b="0">
-                <a:solidFill>
-                  <a:srgbClr val="DCDCE6"/>
+              <a:defRPr sz="1900" b="0" i="1">
+                <a:solidFill>
+                  <a:srgbClr val="FAFAFF"/>
+                </a:solidFill>
+                <a:latin typeface="Calibri Light"/>
+              </a:defRPr>
+            </a:pPr>
+            <a:r>
+              <a:t>What does a parent owe a child when humanity itself is at stake?</a:t>
+            </a:r>
+          </a:p>
+        </p:txBody>
+      </p:sp>
+      <p:sp>
+        <p:nvSpPr>
+          <p:cNvPr id="7" name="Rounded Rectangle 6"/>
+          <p:cNvSpPr/>
+          <p:nvPr/>
+        </p:nvSpPr>
+        <p:spPr>
+          <a:xfrm>
+            <a:off x="7863840" y="1371600"/>
+            <a:ext cx="3931920" cy="3474720"/>
+          </a:xfrm>
+          <a:prstGeom prst="roundRect">
+            <a:avLst/>
+          </a:prstGeom>
+          <a:solidFill>
+            <a:srgbClr val="141932"/>
+          </a:solidFill>
+          <a:ln w="15240">
+            <a:solidFill>
+              <a:srgbClr val="FFC33C"/>
+            </a:solidFill>
+          </a:ln>
+        </p:spPr>
+        <p:style>
+          <a:lnRef idx="1">
+            <a:schemeClr val="accent1"/>
+          </a:lnRef>
+          <a:fillRef idx="3">
+            <a:schemeClr val="accent1"/>
+          </a:fillRef>
+          <a:effectRef idx="2">
+            <a:schemeClr val="accent1"/>
+          </a:effectRef>
+          <a:fontRef idx="minor">
+            <a:schemeClr val="lt1"/>
+          </a:fontRef>
+        </p:style>
+        <p:txBody>
+          <a:bodyPr rtlCol="0" anchor="ctr"/>
+          <a:lstStyle/>
+          <a:p>
+            <a:pPr algn="ctr"/>
+          </a:p>
+        </p:txBody>
+      </p:sp>
+      <p:sp>
+        <p:nvSpPr>
+          <p:cNvPr id="8" name="TextBox 7"/>
+          <p:cNvSpPr txBox="1"/>
+          <p:nvPr/>
+        </p:nvSpPr>
+        <p:spPr>
+          <a:xfrm>
+            <a:off x="8229600" y="1645920"/>
+            <a:ext cx="3291840" cy="457200"/>
+          </a:xfrm>
+          <a:prstGeom prst="rect">
+            <a:avLst/>
+          </a:prstGeom>
+          <a:noFill/>
+        </p:spPr>
+        <p:txBody>
+          <a:bodyPr wrap="square">
+            <a:spAutoFit/>
+          </a:bodyPr>
+          <a:lstStyle/>
+          <a:p>
+            <a:pPr algn="ctr">
+              <a:defRPr sz="1200" b="1" i="0">
+                <a:solidFill>
+                  <a:srgbClr val="969BB4"/>
                 </a:solidFill>
                 <a:latin typeface="Calibri"/>
               </a:defRPr>
             </a:pPr>
             <a:r>
-              <a:t>• Ellie Arroway — only human to make first contact</a:t>
-            </a:r>
+              <a:t>GENRE PARALLEL</a:t>
+            </a:r>
+          </a:p>
+        </p:txBody>
+      </p:sp>
+      <p:sp>
+        <p:nvSpPr>
+          <p:cNvPr id="9" name="TextBox 8"/>
+          <p:cNvSpPr txBox="1"/>
+          <p:nvPr/>
+        </p:nvSpPr>
+        <p:spPr>
+          <a:xfrm>
+            <a:off x="8229600" y="2103120"/>
+            <a:ext cx="3291840" cy="457200"/>
+          </a:xfrm>
+          <a:prstGeom prst="rect">
+            <a:avLst/>
+          </a:prstGeom>
+          <a:noFill/>
+        </p:spPr>
+        <p:txBody>
+          <a:bodyPr wrap="square">
+            <a:spAutoFit/>
+          </a:bodyPr>
+          <a:lstStyle/>
+          <a:p>
+            <a:pPr algn="ctr">
+              <a:defRPr sz="2000" b="1" i="0">
+                <a:solidFill>
+                  <a:srgbClr val="FFC33C"/>
+                </a:solidFill>
+                <a:latin typeface="Calibri Light"/>
+              </a:defRPr>
+            </a:pPr>
+            <a:r>
+              <a:t>Contact (1997)</a:t>
+            </a:r>
+          </a:p>
+        </p:txBody>
+      </p:sp>
+      <p:sp>
+        <p:nvSpPr>
+          <p:cNvPr id="10" name="TextBox 9"/>
+          <p:cNvSpPr txBox="1"/>
+          <p:nvPr/>
+        </p:nvSpPr>
+        <p:spPr>
+          <a:xfrm>
+            <a:off x="8229600" y="2743200"/>
+            <a:ext cx="3474720" cy="1828800"/>
+          </a:xfrm>
+          <a:prstGeom prst="rect">
+            <a:avLst/>
+          </a:prstGeom>
+          <a:noFill/>
+        </p:spPr>
+        <p:txBody>
+          <a:bodyPr wrap="square">
+            <a:spAutoFit/>
+          </a:bodyPr>
+          <a:lstStyle/>
+          <a:p>
+            <a:pPr algn="l">
+              <a:defRPr sz="1200" b="0" i="0">
+                <a:solidFill>
+                  <a:srgbClr val="FFFFFF"/>
+                </a:solidFill>
+                <a:latin typeface="Calibri Light"/>
+              </a:defRPr>
+            </a:pPr>
           </a:p>
           <a:p>
             <a:pPr algn="l">
               <a:spcBef>
-                <a:spcPts val="1200"/>
+                <a:spcPts val="600"/>
               </a:spcBef>
-              <a:defRPr sz="1800" b="0">
-                <a:solidFill>
-                  <a:srgbClr val="DCDCE6"/>
-                </a:solidFill>
-                <a:latin typeface="Calibri"/>
-              </a:defRPr>
-            </a:pPr>
-            <a:r>
-              <a:t>• Isolation becomes a lens for science vs. faith, individual vs. institution</a:t>
+              <a:defRPr sz="1500" b="0" i="0">
+                <a:solidFill>
+                  <a:srgbClr val="D2D7E6"/>
+                </a:solidFill>
+                <a:latin typeface="Calibri Light"/>
+              </a:defRPr>
+            </a:pPr>
+            <a:r>
+              <a:t>Ellie Arroway — only human to make first contact</a:t>
+            </a:r>
+          </a:p>
+          <a:p>
+            <a:pPr algn="l">
+              <a:spcBef>
+                <a:spcPts val="1000"/>
+              </a:spcBef>
+              <a:defRPr sz="1500" b="0" i="0">
+                <a:solidFill>
+                  <a:srgbClr val="D2D7E6"/>
+                </a:solidFill>
+                <a:latin typeface="Calibri Light"/>
+              </a:defRPr>
+            </a:pPr>
+            <a:r>
+              <a:t>Isolation becomes a lens for science vs. faith, individual vs. institution</a:t>
             </a:r>
           </a:p>
         </p:txBody>
@@ -5186,6 +7384,9 @@
   <p:clrMapOvr>
     <a:masterClrMapping/>
   </p:clrMapOvr>
+  <p:transition xmlns:ns0="http://schemas.microsoft.com/office/powerpoint/2010/main" spd="med" ns0:dur="800">
+    <p:push dir="l"/>
+  </p:transition>
 </p:sld>
 </file>
 
@@ -5195,7 +7396,7 @@
     <p:bg>
       <p:bgPr>
         <a:solidFill>
-          <a:srgbClr val="0A0A1E"/>
+          <a:srgbClr val="08081C"/>
         </a:solidFill>
         <a:effectLst/>
       </p:bgPr>
@@ -5209,14 +7410,59 @@
       <p:grpSpPr/>
       <p:sp>
         <p:nvSpPr>
-          <p:cNvPr id="2" name="TextBox 1"/>
+          <p:cNvPr id="2" name="Oval 1"/>
+          <p:cNvSpPr/>
+          <p:nvPr/>
+        </p:nvSpPr>
+        <p:spPr>
+          <a:xfrm>
+            <a:off x="8229600" y="4114800"/>
+            <a:ext cx="3657600" cy="3657600"/>
+          </a:xfrm>
+          <a:prstGeom prst="ellipse">
+            <a:avLst/>
+          </a:prstGeom>
+          <a:solidFill>
+            <a:srgbClr val="FFC33C">
+              <a:alpha val="6000"/>
+            </a:srgbClr>
+          </a:solidFill>
+          <a:ln>
+            <a:noFill/>
+          </a:ln>
+        </p:spPr>
+        <p:style>
+          <a:lnRef idx="1">
+            <a:schemeClr val="accent1"/>
+          </a:lnRef>
+          <a:fillRef idx="3">
+            <a:schemeClr val="accent1"/>
+          </a:fillRef>
+          <a:effectRef idx="2">
+            <a:schemeClr val="accent1"/>
+          </a:effectRef>
+          <a:fontRef idx="minor">
+            <a:schemeClr val="lt1"/>
+          </a:fontRef>
+        </p:style>
+        <p:txBody>
+          <a:bodyPr rtlCol="0" anchor="ctr"/>
+          <a:lstStyle/>
+          <a:p>
+            <a:pPr algn="ctr"/>
+          </a:p>
+        </p:txBody>
+      </p:sp>
+      <p:sp>
+        <p:nvSpPr>
+          <p:cNvPr id="3" name="TextBox 2"/>
           <p:cNvSpPr txBox="1"/>
           <p:nvPr/>
         </p:nvSpPr>
         <p:spPr>
           <a:xfrm>
             <a:off x="731520" y="365760"/>
-            <a:ext cx="10058400" cy="822960"/>
+            <a:ext cx="8229600" cy="731520"/>
           </a:xfrm>
           <a:prstGeom prst="rect">
             <a:avLst/>
@@ -5230,9 +7476,9 @@
           <a:lstStyle/>
           <a:p>
             <a:pPr algn="l">
-              <a:defRPr sz="3200" b="1">
-                <a:solidFill>
-                  <a:srgbClr val="64B4FF"/>
+              <a:defRPr sz="3000" b="1" i="0">
+                <a:solidFill>
+                  <a:srgbClr val="5AAAFF"/>
                 </a:solidFill>
                 <a:latin typeface="Calibri"/>
               </a:defRPr>
@@ -5245,14 +7491,58 @@
       </p:sp>
       <p:sp>
         <p:nvSpPr>
-          <p:cNvPr id="3" name="TextBox 2"/>
+          <p:cNvPr id="4" name="Rectangle 3"/>
+          <p:cNvSpPr/>
+          <p:nvPr/>
+        </p:nvSpPr>
+        <p:spPr>
+          <a:xfrm>
+            <a:off x="731520" y="1051560"/>
+            <a:ext cx="5486400" cy="25400"/>
+          </a:xfrm>
+          <a:prstGeom prst="rect">
+            <a:avLst/>
+          </a:prstGeom>
+          <a:solidFill>
+            <a:srgbClr val="5AAAFF"/>
+          </a:solidFill>
+          <a:ln>
+            <a:noFill/>
+          </a:ln>
+          <a:effectLst/>
+        </p:spPr>
+        <p:style>
+          <a:lnRef idx="1">
+            <a:schemeClr val="accent1"/>
+          </a:lnRef>
+          <a:fillRef idx="3">
+            <a:schemeClr val="accent1"/>
+          </a:fillRef>
+          <a:effectRef idx="2">
+            <a:schemeClr val="accent1"/>
+          </a:effectRef>
+          <a:fontRef idx="minor">
+            <a:schemeClr val="lt1"/>
+          </a:fontRef>
+        </p:style>
+        <p:txBody>
+          <a:bodyPr rtlCol="0" anchor="ctr"/>
+          <a:lstStyle/>
+          <a:p>
+            <a:pPr algn="ctr"/>
+          </a:p>
+        </p:txBody>
+      </p:sp>
+      <p:sp>
+        <p:nvSpPr>
+          <p:cNvPr id="5" name="TextBox 4"/>
           <p:cNvSpPr txBox="1"/>
           <p:nvPr/>
         </p:nvSpPr>
         <p:spPr>
           <a:xfrm>
             <a:off x="731520" y="1371600"/>
-            <a:ext cx="10515600" cy="5029200"/>
+            <a:ext cx="4572000" cy="457200"/>
           </a:xfrm>
           <a:prstGeom prst="rect">
             <a:avLst/>
@@ -5266,140 +7556,310 @@
           <a:lstStyle/>
           <a:p>
             <a:pPr algn="l">
-              <a:defRPr sz="2200" b="1">
-                <a:solidFill>
-                  <a:srgbClr val="FFC850"/>
+              <a:defRPr sz="1600" b="1" i="0">
+                <a:solidFill>
+                  <a:srgbClr val="FFC33C"/>
                 </a:solidFill>
                 <a:latin typeface="Calibri"/>
               </a:defRPr>
             </a:pPr>
             <a:r>
-              <a:t>Interstellar</a:t>
-            </a:r>
+              <a:t>INTERSTELLAR</a:t>
+            </a:r>
+          </a:p>
+        </p:txBody>
+      </p:sp>
+      <p:sp>
+        <p:nvSpPr>
+          <p:cNvPr id="6" name="TextBox 5"/>
+          <p:cNvSpPr txBox="1"/>
+          <p:nvPr/>
+        </p:nvSpPr>
+        <p:spPr>
+          <a:xfrm>
+            <a:off x="731520" y="1828800"/>
+            <a:ext cx="6858000" cy="4114800"/>
+          </a:xfrm>
+          <a:prstGeom prst="rect">
+            <a:avLst/>
+          </a:prstGeom>
+          <a:noFill/>
+        </p:spPr>
+        <p:txBody>
+          <a:bodyPr wrap="square">
+            <a:spAutoFit/>
+          </a:bodyPr>
+          <a:lstStyle/>
+          <a:p>
+            <a:pPr algn="l">
+              <a:defRPr sz="1200" b="0" i="0">
+                <a:solidFill>
+                  <a:srgbClr val="FFFFFF"/>
+                </a:solidFill>
+                <a:latin typeface="Calibri Light"/>
+              </a:defRPr>
+            </a:pPr>
           </a:p>
           <a:p>
             <a:pPr algn="l">
               <a:spcBef>
-                <a:spcPts val="1200"/>
+                <a:spcPts val="800"/>
               </a:spcBef>
-              <a:defRPr sz="1800" b="0">
-                <a:solidFill>
-                  <a:srgbClr val="DCDCE6"/>
-                </a:solidFill>
-                <a:latin typeface="Calibri"/>
-              </a:defRPr>
-            </a:pPr>
-            <a:r>
-              <a:t>• What if Earth became uninhabitable and humanity had one launch window?</a:t>
+              <a:defRPr sz="1700" b="0" i="0">
+                <a:solidFill>
+                  <a:srgbClr val="D2D7E6"/>
+                </a:solidFill>
+                <a:latin typeface="Calibri Light"/>
+              </a:defRPr>
+            </a:pPr>
+            <a:r>
+              <a:t>▸  What if Earth became uninhabitable and humanity had one</a:t>
             </a:r>
           </a:p>
           <a:p>
             <a:pPr algn="l">
               <a:spcBef>
-                <a:spcPts val="1200"/>
+                <a:spcPts val="200"/>
               </a:spcBef>
-              <a:defRPr sz="1800" b="0">
-                <a:solidFill>
-                  <a:srgbClr val="DCDCE6"/>
-                </a:solidFill>
-                <a:latin typeface="Calibri"/>
-              </a:defRPr>
-            </a:pPr>
-            <a:r>
-              <a:t>• Forces the question: who gets to decide who lives?</a:t>
+              <a:defRPr sz="1700" b="0" i="0">
+                <a:solidFill>
+                  <a:srgbClr val="D2D7E6"/>
+                </a:solidFill>
+                <a:latin typeface="Calibri Light"/>
+              </a:defRPr>
+            </a:pPr>
+            <a:r>
+              <a:t>    launch window?</a:t>
             </a:r>
           </a:p>
           <a:p>
             <a:pPr algn="l">
               <a:spcBef>
-                <a:spcPts val="1200"/>
+                <a:spcPts val="800"/>
               </a:spcBef>
-              <a:defRPr sz="1800" b="0">
-                <a:solidFill>
-                  <a:srgbClr val="DCDCE6"/>
-                </a:solidFill>
-                <a:latin typeface="Calibri"/>
-              </a:defRPr>
-            </a:pPr>
-            <a:r>
-              <a:t>• Brand's monologue — love as the only force transcending dimensions</a:t>
+              <a:defRPr sz="1700" b="0" i="0">
+                <a:solidFill>
+                  <a:srgbClr val="D2D7E6"/>
+                </a:solidFill>
+                <a:latin typeface="Calibri Light"/>
+              </a:defRPr>
+            </a:pPr>
+            <a:r>
+              <a:t>▸  Forces the question: who gets to decide who lives?</a:t>
             </a:r>
           </a:p>
           <a:p>
             <a:pPr algn="l">
               <a:spcBef>
-                <a:spcPts val="1200"/>
+                <a:spcPts val="800"/>
               </a:spcBef>
-              <a:defRPr sz="1800" b="0">
-                <a:solidFill>
-                  <a:srgbClr val="DCDCE6"/>
-                </a:solidFill>
-                <a:latin typeface="Calibri"/>
-              </a:defRPr>
-            </a:pPr>
-            <a:r>
-              <a:t>• The film's emotional answer and political argument</a:t>
+              <a:defRPr sz="1700" b="0" i="0">
+                <a:solidFill>
+                  <a:srgbClr val="D2D7E6"/>
+                </a:solidFill>
+                <a:latin typeface="Calibri Light"/>
+              </a:defRPr>
+            </a:pPr>
+            <a:r>
+              <a:t>▸  Brand's monologue: love as the only force that transcends</a:t>
             </a:r>
           </a:p>
           <a:p>
             <a:pPr algn="l">
               <a:spcBef>
-                <a:spcPts val="1200"/>
+                <a:spcPts val="200"/>
               </a:spcBef>
-              <a:defRPr sz="1000" b="0">
+              <a:defRPr sz="1700" b="0" i="0">
+                <a:solidFill>
+                  <a:srgbClr val="D2D7E6"/>
+                </a:solidFill>
+                <a:latin typeface="Calibri Light"/>
+              </a:defRPr>
+            </a:pPr>
+            <a:r>
+              <a:t>    dimensions — the film's emotional answer &amp; political argument</a:t>
+            </a:r>
+          </a:p>
+        </p:txBody>
+      </p:sp>
+      <p:sp>
+        <p:nvSpPr>
+          <p:cNvPr id="7" name="Rounded Rectangle 6"/>
+          <p:cNvSpPr/>
+          <p:nvPr/>
+        </p:nvSpPr>
+        <p:spPr>
+          <a:xfrm>
+            <a:off x="7863840" y="1371600"/>
+            <a:ext cx="3931920" cy="3474720"/>
+          </a:xfrm>
+          <a:prstGeom prst="roundRect">
+            <a:avLst/>
+          </a:prstGeom>
+          <a:solidFill>
+            <a:srgbClr val="141932"/>
+          </a:solidFill>
+          <a:ln w="15240">
+            <a:solidFill>
+              <a:srgbClr val="FFC33C"/>
+            </a:solidFill>
+          </a:ln>
+        </p:spPr>
+        <p:style>
+          <a:lnRef idx="1">
+            <a:schemeClr val="accent1"/>
+          </a:lnRef>
+          <a:fillRef idx="3">
+            <a:schemeClr val="accent1"/>
+          </a:fillRef>
+          <a:effectRef idx="2">
+            <a:schemeClr val="accent1"/>
+          </a:effectRef>
+          <a:fontRef idx="minor">
+            <a:schemeClr val="lt1"/>
+          </a:fontRef>
+        </p:style>
+        <p:txBody>
+          <a:bodyPr rtlCol="0" anchor="ctr"/>
+          <a:lstStyle/>
+          <a:p>
+            <a:pPr algn="ctr"/>
+          </a:p>
+        </p:txBody>
+      </p:sp>
+      <p:sp>
+        <p:nvSpPr>
+          <p:cNvPr id="8" name="TextBox 7"/>
+          <p:cNvSpPr txBox="1"/>
+          <p:nvPr/>
+        </p:nvSpPr>
+        <p:spPr>
+          <a:xfrm>
+            <a:off x="8229600" y="1645920"/>
+            <a:ext cx="3291840" cy="457200"/>
+          </a:xfrm>
+          <a:prstGeom prst="rect">
+            <a:avLst/>
+          </a:prstGeom>
+          <a:noFill/>
+        </p:spPr>
+        <p:txBody>
+          <a:bodyPr wrap="square">
+            <a:spAutoFit/>
+          </a:bodyPr>
+          <a:lstStyle/>
+          <a:p>
+            <a:pPr algn="ctr">
+              <a:defRPr sz="1200" b="1" i="0">
+                <a:solidFill>
+                  <a:srgbClr val="969BB4"/>
+                </a:solidFill>
+                <a:latin typeface="Calibri"/>
+              </a:defRPr>
+            </a:pPr>
+            <a:r>
+              <a:t>GENRE PARALLEL</a:t>
+            </a:r>
+          </a:p>
+        </p:txBody>
+      </p:sp>
+      <p:sp>
+        <p:nvSpPr>
+          <p:cNvPr id="9" name="TextBox 8"/>
+          <p:cNvSpPr txBox="1"/>
+          <p:nvPr/>
+        </p:nvSpPr>
+        <p:spPr>
+          <a:xfrm>
+            <a:off x="8229600" y="2103120"/>
+            <a:ext cx="3291840" cy="457200"/>
+          </a:xfrm>
+          <a:prstGeom prst="rect">
+            <a:avLst/>
+          </a:prstGeom>
+          <a:noFill/>
+        </p:spPr>
+        <p:txBody>
+          <a:bodyPr wrap="square">
+            <a:spAutoFit/>
+          </a:bodyPr>
+          <a:lstStyle/>
+          <a:p>
+            <a:pPr algn="ctr">
+              <a:defRPr sz="2000" b="1" i="0">
+                <a:solidFill>
+                  <a:srgbClr val="FFC33C"/>
+                </a:solidFill>
+                <a:latin typeface="Calibri Light"/>
+              </a:defRPr>
+            </a:pPr>
+            <a:r>
+              <a:t>Arrival (2016)</a:t>
+            </a:r>
+          </a:p>
+        </p:txBody>
+      </p:sp>
+      <p:sp>
+        <p:nvSpPr>
+          <p:cNvPr id="10" name="TextBox 9"/>
+          <p:cNvSpPr txBox="1"/>
+          <p:nvPr/>
+        </p:nvSpPr>
+        <p:spPr>
+          <a:xfrm>
+            <a:off x="8229600" y="2743200"/>
+            <a:ext cx="3474720" cy="1828800"/>
+          </a:xfrm>
+          <a:prstGeom prst="rect">
+            <a:avLst/>
+          </a:prstGeom>
+          <a:noFill/>
+        </p:spPr>
+        <p:txBody>
+          <a:bodyPr wrap="square">
+            <a:spAutoFit/>
+          </a:bodyPr>
+          <a:lstStyle/>
+          <a:p>
+            <a:pPr algn="l">
+              <a:defRPr sz="1200" b="0" i="0">
                 <a:solidFill>
                   <a:srgbClr val="FFFFFF"/>
                 </a:solidFill>
-                <a:latin typeface="Calibri"/>
+                <a:latin typeface="Calibri Light"/>
               </a:defRPr>
             </a:pPr>
           </a:p>
           <a:p>
             <a:pPr algn="l">
               <a:spcBef>
-                <a:spcPts val="1200"/>
+                <a:spcPts val="600"/>
               </a:spcBef>
-              <a:defRPr sz="2200" b="1">
-                <a:solidFill>
-                  <a:srgbClr val="FFC850"/>
-                </a:solidFill>
-                <a:latin typeface="Calibri"/>
-              </a:defRPr>
-            </a:pPr>
-            <a:r>
-              <a:t>Genre Parallel: Arrival (2016)</a:t>
+              <a:defRPr sz="1500" b="0" i="0">
+                <a:solidFill>
+                  <a:srgbClr val="D2D7E6"/>
+                </a:solidFill>
+                <a:latin typeface="Calibri Light"/>
+              </a:defRPr>
+            </a:pPr>
+            <a:r>
+              <a:t>What if aliens arrived and the only tool was language?</a:t>
             </a:r>
           </a:p>
           <a:p>
             <a:pPr algn="l">
               <a:spcBef>
-                <a:spcPts val="1200"/>
+                <a:spcPts val="1000"/>
               </a:spcBef>
-              <a:defRPr sz="1800" b="0">
-                <a:solidFill>
-                  <a:srgbClr val="DCDCE6"/>
-                </a:solidFill>
-                <a:latin typeface="Calibri"/>
-              </a:defRPr>
-            </a:pPr>
-            <a:r>
-              <a:t>• What if aliens arrived and the only tool was language?</a:t>
-            </a:r>
-          </a:p>
-          <a:p>
-            <a:pPr algn="l">
-              <a:spcBef>
-                <a:spcPts val="1200"/>
-              </a:spcBef>
-              <a:defRPr sz="1800" b="0">
-                <a:solidFill>
-                  <a:srgbClr val="DCDCE6"/>
-                </a:solidFill>
-                <a:latin typeface="Calibri"/>
-              </a:defRPr>
-            </a:pPr>
-            <a:r>
-              <a:t>• Forces questions about communication, determinism, and choice</a:t>
+              <a:defRPr sz="1500" b="0" i="0">
+                <a:solidFill>
+                  <a:srgbClr val="D2D7E6"/>
+                </a:solidFill>
+                <a:latin typeface="Calibri Light"/>
+              </a:defRPr>
+            </a:pPr>
+            <a:r>
+              <a:t>Forces questions about communication, determinism, and choice</a:t>
             </a:r>
           </a:p>
         </p:txBody>
@@ -5409,6 +7869,9 @@
   <p:clrMapOvr>
     <a:masterClrMapping/>
   </p:clrMapOvr>
+  <p:transition xmlns:ns0="http://schemas.microsoft.com/office/powerpoint/2010/main" spd="med" ns0:dur="800">
+    <p:push dir="l"/>
+  </p:transition>
 </p:sld>
 </file>
 
@@ -5418,7 +7881,7 @@
     <p:bg>
       <p:bgPr>
         <a:solidFill>
-          <a:srgbClr val="141432"/>
+          <a:srgbClr val="101230"/>
         </a:solidFill>
         <a:effectLst/>
       </p:bgPr>
@@ -5432,14 +7895,148 @@
       <p:grpSpPr/>
       <p:sp>
         <p:nvSpPr>
-          <p:cNvPr id="2" name="TextBox 1"/>
+          <p:cNvPr id="2" name="Oval 1"/>
+          <p:cNvSpPr/>
+          <p:nvPr/>
+        </p:nvSpPr>
+        <p:spPr>
+          <a:xfrm>
+            <a:off x="4572000" y="1371600"/>
+            <a:ext cx="6400800" cy="6400800"/>
+          </a:xfrm>
+          <a:prstGeom prst="ellipse">
+            <a:avLst/>
+          </a:prstGeom>
+          <a:solidFill>
+            <a:srgbClr val="FF8C3C">
+              <a:alpha val="4000"/>
+            </a:srgbClr>
+          </a:solidFill>
+          <a:ln>
+            <a:noFill/>
+          </a:ln>
+        </p:spPr>
+        <p:style>
+          <a:lnRef idx="1">
+            <a:schemeClr val="accent1"/>
+          </a:lnRef>
+          <a:fillRef idx="3">
+            <a:schemeClr val="accent1"/>
+          </a:fillRef>
+          <a:effectRef idx="2">
+            <a:schemeClr val="accent1"/>
+          </a:effectRef>
+          <a:fontRef idx="minor">
+            <a:schemeClr val="lt1"/>
+          </a:fontRef>
+        </p:style>
+        <p:txBody>
+          <a:bodyPr rtlCol="0" anchor="ctr"/>
+          <a:lstStyle/>
+          <a:p>
+            <a:pPr algn="ctr"/>
+          </a:p>
+        </p:txBody>
+      </p:sp>
+      <p:sp>
+        <p:nvSpPr>
+          <p:cNvPr id="3" name="Oval 2"/>
+          <p:cNvSpPr/>
+          <p:nvPr/>
+        </p:nvSpPr>
+        <p:spPr>
+          <a:xfrm>
+            <a:off x="-1828800" y="2743200"/>
+            <a:ext cx="4572000" cy="4572000"/>
+          </a:xfrm>
+          <a:prstGeom prst="ellipse">
+            <a:avLst/>
+          </a:prstGeom>
+          <a:solidFill>
+            <a:srgbClr val="5AAAFF">
+              <a:alpha val="5000"/>
+            </a:srgbClr>
+          </a:solidFill>
+          <a:ln>
+            <a:noFill/>
+          </a:ln>
+        </p:spPr>
+        <p:style>
+          <a:lnRef idx="1">
+            <a:schemeClr val="accent1"/>
+          </a:lnRef>
+          <a:fillRef idx="3">
+            <a:schemeClr val="accent1"/>
+          </a:fillRef>
+          <a:effectRef idx="2">
+            <a:schemeClr val="accent1"/>
+          </a:effectRef>
+          <a:fontRef idx="minor">
+            <a:schemeClr val="lt1"/>
+          </a:fontRef>
+        </p:style>
+        <p:txBody>
+          <a:bodyPr rtlCol="0" anchor="ctr"/>
+          <a:lstStyle/>
+          <a:p>
+            <a:pPr algn="ctr"/>
+          </a:p>
+        </p:txBody>
+      </p:sp>
+      <p:sp>
+        <p:nvSpPr>
+          <p:cNvPr id="4" name="Rectangle 3"/>
+          <p:cNvSpPr/>
+          <p:nvPr/>
+        </p:nvSpPr>
+        <p:spPr>
+          <a:xfrm>
+            <a:off x="4114800" y="2560320"/>
+            <a:ext cx="3931920" cy="25400"/>
+          </a:xfrm>
+          <a:prstGeom prst="rect">
+            <a:avLst/>
+          </a:prstGeom>
+          <a:solidFill>
+            <a:srgbClr val="FF8C3C"/>
+          </a:solidFill>
+          <a:ln>
+            <a:noFill/>
+          </a:ln>
+          <a:effectLst/>
+        </p:spPr>
+        <p:style>
+          <a:lnRef idx="1">
+            <a:schemeClr val="accent1"/>
+          </a:lnRef>
+          <a:fillRef idx="3">
+            <a:schemeClr val="accent1"/>
+          </a:fillRef>
+          <a:effectRef idx="2">
+            <a:schemeClr val="accent1"/>
+          </a:effectRef>
+          <a:fontRef idx="minor">
+            <a:schemeClr val="lt1"/>
+          </a:fontRef>
+        </p:style>
+        <p:txBody>
+          <a:bodyPr rtlCol="0" anchor="ctr"/>
+          <a:lstStyle/>
+          <a:p>
+            <a:pPr algn="ctr"/>
+          </a:p>
+        </p:txBody>
+      </p:sp>
+      <p:sp>
+        <p:nvSpPr>
+          <p:cNvPr id="5" name="TextBox 4"/>
           <p:cNvSpPr txBox="1"/>
           <p:nvPr/>
         </p:nvSpPr>
         <p:spPr>
           <a:xfrm>
-            <a:off x="914400" y="2286000"/>
-            <a:ext cx="10058400" cy="914400"/>
+            <a:off x="914400" y="2743200"/>
+            <a:ext cx="10332720" cy="1097280"/>
           </a:xfrm>
           <a:prstGeom prst="rect">
             <a:avLst/>
@@ -5453,9 +8050,9 @@
           <a:lstStyle/>
           <a:p>
             <a:pPr algn="ctr">
-              <a:defRPr sz="4400" b="1">
-                <a:solidFill>
-                  <a:srgbClr val="FFC850"/>
+              <a:defRPr sz="5000" b="1" i="0">
+                <a:solidFill>
+                  <a:srgbClr val="FFC33C"/>
                 </a:solidFill>
                 <a:latin typeface="Calibri"/>
               </a:defRPr>
@@ -5468,14 +8065,14 @@
       </p:sp>
       <p:sp>
         <p:nvSpPr>
-          <p:cNvPr id="3" name="TextBox 2"/>
+          <p:cNvPr id="6" name="TextBox 5"/>
           <p:cNvSpPr txBox="1"/>
           <p:nvPr/>
         </p:nvSpPr>
         <p:spPr>
           <a:xfrm>
-            <a:off x="1371600" y="3657600"/>
-            <a:ext cx="9144000" cy="914400"/>
+            <a:off x="1371600" y="4023360"/>
+            <a:ext cx="9418320" cy="640080"/>
           </a:xfrm>
           <a:prstGeom prst="rect">
             <a:avLst/>
@@ -5489,16 +8086,60 @@
           <a:lstStyle/>
           <a:p>
             <a:pPr algn="ctr">
-              <a:defRPr sz="2200" b="0">
-                <a:solidFill>
-                  <a:srgbClr val="AAAABE"/>
-                </a:solidFill>
-                <a:latin typeface="Calibri"/>
-              </a:defRPr>
-            </a:pPr>
-            <a:r>
-              <a:t>Plot Synopsis &amp; Evaluation</a:t>
-            </a:r>
+              <a:defRPr sz="2000" b="0" i="0">
+                <a:solidFill>
+                  <a:srgbClr val="969BB4"/>
+                </a:solidFill>
+                <a:latin typeface="Calibri Light"/>
+              </a:defRPr>
+            </a:pPr>
+            <a:r>
+              <a:t>Plot Synopsis  &amp;  Evaluation</a:t>
+            </a:r>
+          </a:p>
+        </p:txBody>
+      </p:sp>
+      <p:sp>
+        <p:nvSpPr>
+          <p:cNvPr id="7" name="Rectangle 6"/>
+          <p:cNvSpPr/>
+          <p:nvPr/>
+        </p:nvSpPr>
+        <p:spPr>
+          <a:xfrm>
+            <a:off x="4114800" y="4846320"/>
+            <a:ext cx="3931920" cy="25400"/>
+          </a:xfrm>
+          <a:prstGeom prst="rect">
+            <a:avLst/>
+          </a:prstGeom>
+          <a:solidFill>
+            <a:srgbClr val="FF8C3C"/>
+          </a:solidFill>
+          <a:ln>
+            <a:noFill/>
+          </a:ln>
+          <a:effectLst/>
+        </p:spPr>
+        <p:style>
+          <a:lnRef idx="1">
+            <a:schemeClr val="accent1"/>
+          </a:lnRef>
+          <a:fillRef idx="3">
+            <a:schemeClr val="accent1"/>
+          </a:fillRef>
+          <a:effectRef idx="2">
+            <a:schemeClr val="accent1"/>
+          </a:effectRef>
+          <a:fontRef idx="minor">
+            <a:schemeClr val="lt1"/>
+          </a:fontRef>
+        </p:style>
+        <p:txBody>
+          <a:bodyPr rtlCol="0" anchor="ctr"/>
+          <a:lstStyle/>
+          <a:p>
+            <a:pPr algn="ctr"/>
           </a:p>
         </p:txBody>
       </p:sp>
@@ -5507,6 +8148,9 @@
   <p:clrMapOvr>
     <a:masterClrMapping/>
   </p:clrMapOvr>
+  <p:transition xmlns:ns0="http://schemas.microsoft.com/office/powerpoint/2010/main" spd="med" ns0:dur="900">
+    <p:wipe dir="d"/>
+  </p:transition>
 </p:sld>
 </file>
 
@@ -5516,7 +8160,7 @@
     <p:bg>
       <p:bgPr>
         <a:solidFill>
-          <a:srgbClr val="0A0A1E"/>
+          <a:srgbClr val="08081C"/>
         </a:solidFill>
         <a:effectLst/>
       </p:bgPr>
@@ -5537,7 +8181,7 @@
         <p:spPr>
           <a:xfrm>
             <a:off x="731520" y="365760"/>
-            <a:ext cx="10058400" cy="822960"/>
+            <a:ext cx="10058400" cy="731520"/>
           </a:xfrm>
           <a:prstGeom prst="rect">
             <a:avLst/>
@@ -5551,9 +8195,9 @@
           <a:lstStyle/>
           <a:p>
             <a:pPr algn="l">
-              <a:defRPr sz="3600" b="1">
-                <a:solidFill>
-                  <a:srgbClr val="64B4FF"/>
+              <a:defRPr sz="3400" b="1" i="0">
+                <a:solidFill>
+                  <a:srgbClr val="5AAAFF"/>
                 </a:solidFill>
                 <a:latin typeface="Calibri"/>
               </a:defRPr>
@@ -5566,14 +8210,58 @@
       </p:sp>
       <p:sp>
         <p:nvSpPr>
-          <p:cNvPr id="3" name="TextBox 2"/>
+          <p:cNvPr id="3" name="Rectangle 2"/>
+          <p:cNvSpPr/>
+          <p:nvPr/>
+        </p:nvSpPr>
+        <p:spPr>
+          <a:xfrm>
+            <a:off x="731520" y="1051560"/>
+            <a:ext cx="2743200" cy="25400"/>
+          </a:xfrm>
+          <a:prstGeom prst="rect">
+            <a:avLst/>
+          </a:prstGeom>
+          <a:solidFill>
+            <a:srgbClr val="5AAAFF"/>
+          </a:solidFill>
+          <a:ln>
+            <a:noFill/>
+          </a:ln>
+          <a:effectLst/>
+        </p:spPr>
+        <p:style>
+          <a:lnRef idx="1">
+            <a:schemeClr val="accent1"/>
+          </a:lnRef>
+          <a:fillRef idx="3">
+            <a:schemeClr val="accent1"/>
+          </a:fillRef>
+          <a:effectRef idx="2">
+            <a:schemeClr val="accent1"/>
+          </a:effectRef>
+          <a:fontRef idx="minor">
+            <a:schemeClr val="lt1"/>
+          </a:fontRef>
+        </p:style>
+        <p:txBody>
+          <a:bodyPr rtlCol="0" anchor="ctr"/>
+          <a:lstStyle/>
+          <a:p>
+            <a:pPr algn="ctr"/>
+          </a:p>
+        </p:txBody>
+      </p:sp>
+      <p:sp>
+        <p:nvSpPr>
+          <p:cNvPr id="4" name="TextBox 3"/>
           <p:cNvSpPr txBox="1"/>
           <p:nvPr/>
         </p:nvSpPr>
         <p:spPr>
           <a:xfrm>
-            <a:off x="731520" y="1463040"/>
-            <a:ext cx="10515600" cy="5029200"/>
+            <a:off x="914400" y="1463040"/>
+            <a:ext cx="10332720" cy="3200400"/>
           </a:xfrm>
           <a:prstGeom prst="rect">
             <a:avLst/>
@@ -5587,96 +8275,160 @@
           <a:lstStyle/>
           <a:p>
             <a:pPr algn="l">
-              <a:defRPr sz="2000" b="0">
-                <a:solidFill>
-                  <a:srgbClr val="DCDCE6"/>
-                </a:solidFill>
-                <a:latin typeface="Calibri"/>
-              </a:defRPr>
-            </a:pPr>
-            <a:r>
-              <a:t>• Earth is dying from crop blight</a:t>
-            </a:r>
+              <a:defRPr sz="1200" b="0" i="0">
+                <a:solidFill>
+                  <a:srgbClr val="FFFFFF"/>
+                </a:solidFill>
+                <a:latin typeface="Calibri Light"/>
+              </a:defRPr>
+            </a:pPr>
           </a:p>
           <a:p>
             <a:pPr algn="l">
               <a:spcBef>
-                <a:spcPts val="1200"/>
+                <a:spcPts val="1400"/>
               </a:spcBef>
-              <a:defRPr sz="2000" b="0">
-                <a:solidFill>
-                  <a:srgbClr val="DCDCE6"/>
-                </a:solidFill>
-                <a:latin typeface="Calibri"/>
-              </a:defRPr>
-            </a:pPr>
-            <a:r>
-              <a:t>• Former NASA pilot Cooper recruited for interstellar mission</a:t>
+              <a:defRPr sz="2000" b="0" i="0">
+                <a:solidFill>
+                  <a:srgbClr val="D2D7E6"/>
+                </a:solidFill>
+                <a:latin typeface="Calibri Light"/>
+              </a:defRPr>
+            </a:pPr>
+            <a:r>
+              <a:t>▸  Earth is dying from crop blight</a:t>
             </a:r>
           </a:p>
           <a:p>
             <a:pPr algn="l">
               <a:spcBef>
-                <a:spcPts val="1200"/>
+                <a:spcPts val="1400"/>
               </a:spcBef>
-              <a:defRPr sz="2000" b="0">
-                <a:solidFill>
-                  <a:srgbClr val="DCDCE6"/>
-                </a:solidFill>
-                <a:latin typeface="Calibri"/>
-              </a:defRPr>
-            </a:pPr>
-            <a:r>
-              <a:t>• Travels through a wormhole near Saturn to find a habitable planet</a:t>
+              <a:defRPr sz="2000" b="0" i="0">
+                <a:solidFill>
+                  <a:srgbClr val="D2D7E6"/>
+                </a:solidFill>
+                <a:latin typeface="Calibri Light"/>
+              </a:defRPr>
+            </a:pPr>
+            <a:r>
+              <a:t>▸  Former NASA pilot Cooper recruited for interstellar mission</a:t>
             </a:r>
           </a:p>
           <a:p>
             <a:pPr algn="l">
               <a:spcBef>
-                <a:spcPts val="1200"/>
+                <a:spcPts val="1400"/>
               </a:spcBef>
-              <a:defRPr sz="2000" b="0">
-                <a:solidFill>
-                  <a:srgbClr val="DCDCE6"/>
-                </a:solidFill>
-                <a:latin typeface="Calibri"/>
-              </a:defRPr>
-            </a:pPr>
-            <a:r>
-              <a:t>• Time dilation, black holes, gravitational physics, and wormhole mechanics drive every major plot event</a:t>
+              <a:defRPr sz="2000" b="0" i="0">
+                <a:solidFill>
+                  <a:srgbClr val="D2D7E6"/>
+                </a:solidFill>
+                <a:latin typeface="Calibri Light"/>
+              </a:defRPr>
+            </a:pPr>
+            <a:r>
+              <a:t>▸  Travels through a wormhole near Saturn → another galaxy</a:t>
             </a:r>
           </a:p>
           <a:p>
             <a:pPr algn="l">
               <a:spcBef>
-                <a:spcPts val="1200"/>
+                <a:spcPts val="1400"/>
               </a:spcBef>
-              <a:defRPr sz="1000" b="0">
-                <a:solidFill>
-                  <a:srgbClr val="FFFFFF"/>
-                </a:solidFill>
-                <a:latin typeface="Calibri"/>
-              </a:defRPr>
-            </a:pPr>
+              <a:defRPr sz="2000" b="0" i="0">
+                <a:solidFill>
+                  <a:srgbClr val="D2D7E6"/>
+                </a:solidFill>
+                <a:latin typeface="Calibri Light"/>
+              </a:defRPr>
+            </a:pPr>
+            <a:r>
+              <a:t>▸  Time dilation, black holes, gravitational physics, and wormhole</a:t>
+            </a:r>
           </a:p>
           <a:p>
             <a:pPr algn="l">
               <a:spcBef>
-                <a:spcPts val="1200"/>
+                <a:spcPts val="200"/>
               </a:spcBef>
-              <a:defRPr sz="2000" b="1">
-                <a:solidFill>
-                  <a:srgbClr val="FFC850"/>
-                </a:solidFill>
-                <a:latin typeface="Calibri"/>
-              </a:defRPr>
-            </a:pPr>
-            <a:r>
-              <a:t>Cooper loses decades with his daughter not because he chose to,</a:t>
-            </a:r>
-            <a:br/>
-            <a:r>
-              <a:t>but because the universe operates on rules that don't care about feelings.</a:t>
+              <a:defRPr sz="2000" b="0" i="0">
+                <a:solidFill>
+                  <a:srgbClr val="D2D7E6"/>
+                </a:solidFill>
+                <a:latin typeface="Calibri Light"/>
+              </a:defRPr>
+            </a:pPr>
+            <a:r>
+              <a:t>    mechanics drive every major plot event</a:t>
+            </a:r>
+          </a:p>
+        </p:txBody>
+      </p:sp>
+      <p:sp>
+        <p:nvSpPr>
+          <p:cNvPr id="5" name="Rounded Rectangle 4"/>
+          <p:cNvSpPr/>
+          <p:nvPr/>
+        </p:nvSpPr>
+        <p:spPr>
+          <a:xfrm>
+            <a:off x="914400" y="5029200"/>
+            <a:ext cx="10332720" cy="1280160"/>
+          </a:xfrm>
+          <a:prstGeom prst="roundRect">
+            <a:avLst/>
+          </a:prstGeom>
+          <a:solidFill>
+            <a:srgbClr val="141632"/>
+          </a:solidFill>
+          <a:ln w="15240">
+            <a:solidFill>
+              <a:srgbClr val="FFC33C"/>
+            </a:solidFill>
+          </a:ln>
+        </p:spPr>
+        <p:style>
+          <a:lnRef idx="1">
+            <a:schemeClr val="accent1"/>
+          </a:lnRef>
+          <a:fillRef idx="3">
+            <a:schemeClr val="accent1"/>
+          </a:fillRef>
+          <a:effectRef idx="2">
+            <a:schemeClr val="accent1"/>
+          </a:effectRef>
+          <a:fontRef idx="minor">
+            <a:schemeClr val="lt1"/>
+          </a:fontRef>
+        </p:style>
+        <p:txBody>
+          <a:bodyPr rtlCol="0" anchor="ctr" wrap="square"/>
+          <a:lstStyle/>
+          <a:p>
+            <a:pPr algn="ctr">
+              <a:defRPr sz="1800" b="0" i="1">
+                <a:solidFill>
+                  <a:srgbClr val="FFC33C"/>
+                </a:solidFill>
+                <a:latin typeface="Calibri Light"/>
+              </a:defRPr>
+            </a:pPr>
+            <a:r>
+              <a:t>  Cooper loses decades with his daughter not because he chose to —</a:t>
+            </a:r>
+          </a:p>
+          <a:p>
+            <a:pPr algn="ctr">
+              <a:defRPr sz="1800" b="0" i="1">
+                <a:solidFill>
+                  <a:srgbClr val="FFC33C"/>
+                </a:solidFill>
+                <a:latin typeface="Calibri Light"/>
+              </a:defRPr>
+            </a:pPr>
+            <a:r>
+              <a:t>  but because the universe operates on rules that don't care about feelings.</a:t>
             </a:r>
           </a:p>
         </p:txBody>
@@ -5686,6 +8438,9 @@
   <p:clrMapOvr>
     <a:masterClrMapping/>
   </p:clrMapOvr>
+  <p:transition xmlns:ns0="http://schemas.microsoft.com/office/powerpoint/2010/main" spd="med" ns0:dur="800">
+    <p:fade thruBlk="1"/>
+  </p:transition>
 </p:sld>
 </file>
 
